--- a/output/seoul-ai-foundation-workshop.pptx
+++ b/output/seoul-ai-foundation-workshop.pptx
@@ -12021,8 +12021,8 @@
         </p:nvSpPr>
         <p:spPr>
           <a:xfrm>
-            <a:off x="6278727" y="1737360"/>
-            <a:ext cx="5364327" cy="2194560"/>
+            <a:off x="6278727" y="1600200"/>
+            <a:ext cx="5364327" cy="2290572"/>
           </a:xfrm>
           <a:prstGeom prst="roundRect">
             <a:avLst>
@@ -12054,33 +12054,7 @@
           </a:fontRef>
         </p:style>
         <p:txBody>
-          <a:bodyPr rtlCol="0" anchor="ctr"/>
-          <a:lstStyle/>
-          <a:p>
-            <a:pPr algn="ctr"/>
-          </a:p>
-        </p:txBody>
-      </p:sp>
-      <p:sp>
-        <p:nvSpPr>
-          <p:cNvPr id="6" name="TextBox 5"/>
-          <p:cNvSpPr txBox="1"/>
-          <p:nvPr/>
-        </p:nvSpPr>
-        <p:spPr>
-          <a:xfrm>
-            <a:off x="6398727" y="1857360"/>
-            <a:ext cx="5124327" cy="450000"/>
-          </a:xfrm>
-          <a:prstGeom prst="rect">
-            <a:avLst/>
-          </a:prstGeom>
-          <a:noFill/>
-        </p:spPr>
-        <p:txBody>
-          <a:bodyPr wrap="square" lIns="0" rIns="0" tIns="0" bIns="0" anchor="t">
-            <a:spAutoFit/>
-          </a:bodyPr>
+          <a:bodyPr rtlCol="0" anchor="t" wrap="square" lIns="110000" rIns="110000" tIns="95000" bIns="95000"/>
           <a:lstStyle/>
           <a:p>
             <a:pPr algn="l">
@@ -12098,34 +12072,14 @@
               <a:t>Before</a:t>
             </a:r>
           </a:p>
-        </p:txBody>
-      </p:sp>
-      <p:sp>
-        <p:nvSpPr>
-          <p:cNvPr id="7" name="TextBox 6"/>
-          <p:cNvSpPr txBox="1"/>
-          <p:nvPr/>
-        </p:nvSpPr>
-        <p:spPr>
-          <a:xfrm>
-            <a:off x="6398727" y="2277360"/>
-            <a:ext cx="5124327" cy="1534560"/>
-          </a:xfrm>
-          <a:prstGeom prst="rect">
-            <a:avLst/>
-          </a:prstGeom>
-          <a:noFill/>
-        </p:spPr>
-        <p:txBody>
-          <a:bodyPr wrap="square" lIns="0" rIns="0" tIns="0" bIns="0" anchor="t">
-            <a:spAutoFit/>
-          </a:bodyPr>
-          <a:lstStyle/>
-          <a:p>
-            <a:pPr algn="l">
-              <a:lnSpc>
-                <a:spcPct val="125000"/>
-              </a:lnSpc>
+          <a:p>
+            <a:pPr algn="l">
+              <a:lnSpc>
+                <a:spcPct val="118000"/>
+              </a:lnSpc>
+              <a:spcBef>
+                <a:spcPts val="400"/>
+              </a:spcBef>
             </a:pPr>
             <a:r>
               <a:rPr sz="1500" b="0" i="0">
@@ -12140,8 +12094,11 @@
           <a:p>
             <a:pPr algn="l">
               <a:lnSpc>
-                <a:spcPct val="125000"/>
-              </a:lnSpc>
+                <a:spcPct val="118000"/>
+              </a:lnSpc>
+              <a:spcBef>
+                <a:spcPts val="400"/>
+              </a:spcBef>
             </a:pPr>
             <a:r>
               <a:rPr sz="1500" b="0" i="0">
@@ -12156,8 +12113,11 @@
           <a:p>
             <a:pPr algn="l">
               <a:lnSpc>
-                <a:spcPct val="125000"/>
-              </a:lnSpc>
+                <a:spcPct val="118000"/>
+              </a:lnSpc>
+              <a:spcBef>
+                <a:spcPts val="400"/>
+              </a:spcBef>
             </a:pPr>
             <a:r>
               <a:rPr sz="1500" b="0" i="0">
@@ -12173,14 +12133,14 @@
       </p:sp>
       <p:sp>
         <p:nvSpPr>
-          <p:cNvPr id="8" name="Rounded Rectangle 7"/>
+          <p:cNvPr id="6" name="Rounded Rectangle 5"/>
           <p:cNvSpPr/>
           <p:nvPr/>
         </p:nvSpPr>
         <p:spPr>
           <a:xfrm>
-            <a:off x="6278727" y="4114800"/>
-            <a:ext cx="5364327" cy="2194560"/>
+            <a:off x="6278727" y="4018788"/>
+            <a:ext cx="5364327" cy="2290572"/>
           </a:xfrm>
           <a:prstGeom prst="roundRect">
             <a:avLst>
@@ -12212,23 +12172,93 @@
           </a:fontRef>
         </p:style>
         <p:txBody>
-          <a:bodyPr rtlCol="0" anchor="ctr"/>
-          <a:lstStyle/>
-          <a:p>
-            <a:pPr algn="ctr"/>
-          </a:p>
-        </p:txBody>
-      </p:sp>
-      <p:sp>
-        <p:nvSpPr>
-          <p:cNvPr id="9" name="TextBox 8"/>
+          <a:bodyPr rtlCol="0" anchor="t" wrap="square" lIns="110000" rIns="110000" tIns="95000" bIns="95000"/>
+          <a:lstStyle/>
+          <a:p>
+            <a:pPr algn="l">
+              <a:lnSpc>
+                <a:spcPct val="115000"/>
+              </a:lnSpc>
+            </a:pPr>
+            <a:r>
+              <a:rPr sz="1700" b="1" i="0">
+                <a:solidFill>
+                  <a:srgbClr val="123C7C"/>
+                </a:solidFill>
+                <a:latin typeface="Apple SD Gothic Neo"/>
+              </a:rPr>
+              <a:t>After</a:t>
+            </a:r>
+          </a:p>
+          <a:p>
+            <a:pPr algn="l">
+              <a:lnSpc>
+                <a:spcPct val="118000"/>
+              </a:lnSpc>
+              <a:spcBef>
+                <a:spcPts val="400"/>
+              </a:spcBef>
+            </a:pPr>
+            <a:r>
+              <a:rPr sz="1500" b="0" i="0">
+                <a:solidFill>
+                  <a:srgbClr val="333333"/>
+                </a:solidFill>
+                <a:latin typeface="Apple SD Gothic Neo"/>
+              </a:rPr>
+              <a:t>PRD와 설계 문서를 기준으로</a:t>
+            </a:r>
+          </a:p>
+          <a:p>
+            <a:pPr algn="l">
+              <a:lnSpc>
+                <a:spcPct val="118000"/>
+              </a:lnSpc>
+              <a:spcBef>
+                <a:spcPts val="400"/>
+              </a:spcBef>
+            </a:pPr>
+            <a:r>
+              <a:rPr sz="1500" b="0" i="0">
+                <a:solidFill>
+                  <a:srgbClr val="333333"/>
+                </a:solidFill>
+                <a:latin typeface="Apple SD Gothic Neo"/>
+              </a:rPr>
+              <a:t>문의 목록 API부터</a:t>
+            </a:r>
+          </a:p>
+          <a:p>
+            <a:pPr algn="l">
+              <a:lnSpc>
+                <a:spcPct val="118000"/>
+              </a:lnSpc>
+              <a:spcBef>
+                <a:spcPts val="400"/>
+              </a:spcBef>
+            </a:pPr>
+            <a:r>
+              <a:rPr sz="1500" b="0" i="0">
+                <a:solidFill>
+                  <a:srgbClr val="333333"/>
+                </a:solidFill>
+                <a:latin typeface="Apple SD Gothic Neo"/>
+              </a:rPr>
+              <a:t>변경 파일과 이유 요약</a:t>
+            </a:r>
+          </a:p>
+        </p:txBody>
+      </p:sp>
+      <p:sp>
+        <p:nvSpPr>
+          <p:cNvPr id="7" name="TextBox 6"/>
           <p:cNvSpPr txBox="1"/>
           <p:nvPr/>
         </p:nvSpPr>
         <p:spPr>
           <a:xfrm>
-            <a:off x="6398727" y="4234800"/>
-            <a:ext cx="5124327" cy="450000"/>
+            <a:off x="548640" y="6492240"/>
+            <a:ext cx="5486400" cy="274320"/>
           </a:xfrm>
           <a:prstGeom prst="rect">
             <a:avLst/>
@@ -12247,122 +12277,12 @@
               </a:lnSpc>
             </a:pPr>
             <a:r>
-              <a:rPr sz="1700" b="1" i="0">
-                <a:solidFill>
-                  <a:srgbClr val="123C7C"/>
-                </a:solidFill>
-                <a:latin typeface="Apple SD Gothic Neo"/>
-              </a:rPr>
-              <a:t>After</a:t>
-            </a:r>
-          </a:p>
-        </p:txBody>
-      </p:sp>
-      <p:sp>
-        <p:nvSpPr>
-          <p:cNvPr id="10" name="TextBox 9"/>
-          <p:cNvSpPr txBox="1"/>
-          <p:nvPr/>
-        </p:nvSpPr>
-        <p:spPr>
-          <a:xfrm>
-            <a:off x="6398727" y="4654800"/>
-            <a:ext cx="5124327" cy="1534560"/>
-          </a:xfrm>
-          <a:prstGeom prst="rect">
-            <a:avLst/>
-          </a:prstGeom>
-          <a:noFill/>
-        </p:spPr>
-        <p:txBody>
-          <a:bodyPr wrap="square" lIns="0" rIns="0" tIns="0" bIns="0" anchor="t">
-            <a:spAutoFit/>
-          </a:bodyPr>
-          <a:lstStyle/>
-          <a:p>
-            <a:pPr algn="l">
-              <a:lnSpc>
-                <a:spcPct val="125000"/>
-              </a:lnSpc>
-            </a:pPr>
-            <a:r>
-              <a:rPr sz="1500" b="0" i="0">
+              <a:rPr sz="1200" b="0" i="0">
                 <a:solidFill>
                   <a:srgbClr val="333333"/>
                 </a:solidFill>
                 <a:latin typeface="Apple SD Gothic Neo"/>
               </a:rPr>
-              <a:t>PRD와 설계 문서를 기준으로</a:t>
-            </a:r>
-          </a:p>
-          <a:p>
-            <a:pPr algn="l">
-              <a:lnSpc>
-                <a:spcPct val="125000"/>
-              </a:lnSpc>
-            </a:pPr>
-            <a:r>
-              <a:rPr sz="1500" b="0" i="0">
-                <a:solidFill>
-                  <a:srgbClr val="333333"/>
-                </a:solidFill>
-                <a:latin typeface="Apple SD Gothic Neo"/>
-              </a:rPr>
-              <a:t>문의 목록 API부터</a:t>
-            </a:r>
-          </a:p>
-          <a:p>
-            <a:pPr algn="l">
-              <a:lnSpc>
-                <a:spcPct val="125000"/>
-              </a:lnSpc>
-            </a:pPr>
-            <a:r>
-              <a:rPr sz="1500" b="0" i="0">
-                <a:solidFill>
-                  <a:srgbClr val="333333"/>
-                </a:solidFill>
-                <a:latin typeface="Apple SD Gothic Neo"/>
-              </a:rPr>
-              <a:t>변경 파일과 이유 요약</a:t>
-            </a:r>
-          </a:p>
-        </p:txBody>
-      </p:sp>
-      <p:sp>
-        <p:nvSpPr>
-          <p:cNvPr id="11" name="TextBox 10"/>
-          <p:cNvSpPr txBox="1"/>
-          <p:nvPr/>
-        </p:nvSpPr>
-        <p:spPr>
-          <a:xfrm>
-            <a:off x="548640" y="6492240"/>
-            <a:ext cx="5486400" cy="274320"/>
-          </a:xfrm>
-          <a:prstGeom prst="rect">
-            <a:avLst/>
-          </a:prstGeom>
-          <a:noFill/>
-        </p:spPr>
-        <p:txBody>
-          <a:bodyPr wrap="square" lIns="0" rIns="0" tIns="0" bIns="0" anchor="t">
-            <a:spAutoFit/>
-          </a:bodyPr>
-          <a:lstStyle/>
-          <a:p>
-            <a:pPr algn="l">
-              <a:lnSpc>
-                <a:spcPct val="115000"/>
-              </a:lnSpc>
-            </a:pPr>
-            <a:r>
-              <a:rPr sz="1200" b="0" i="0">
-                <a:solidFill>
-                  <a:srgbClr val="333333"/>
-                </a:solidFill>
-                <a:latin typeface="Apple SD Gothic Neo"/>
-              </a:rPr>
               <a:t>개발자에서 AI Native로 · 서울AI재단 5시간 워크숍</a:t>
             </a:r>
           </a:p>
@@ -12370,7 +12290,7 @@
       </p:sp>
       <p:sp>
         <p:nvSpPr>
-          <p:cNvPr id="12" name="TextBox 11"/>
+          <p:cNvPr id="8" name="TextBox 7"/>
           <p:cNvSpPr txBox="1"/>
           <p:nvPr/>
         </p:nvSpPr>
@@ -13128,33 +13048,7 @@
           </a:fontRef>
         </p:style>
         <p:txBody>
-          <a:bodyPr rtlCol="0" anchor="ctr"/>
-          <a:lstStyle/>
-          <a:p>
-            <a:pPr algn="ctr"/>
-          </a:p>
-        </p:txBody>
-      </p:sp>
-      <p:sp>
-        <p:nvSpPr>
-          <p:cNvPr id="5" name="TextBox 4"/>
-          <p:cNvSpPr txBox="1"/>
-          <p:nvPr/>
-        </p:nvSpPr>
-        <p:spPr>
-          <a:xfrm>
-            <a:off x="668640" y="1811640"/>
-            <a:ext cx="5192907" cy="450000"/>
-          </a:xfrm>
-          <a:prstGeom prst="rect">
-            <a:avLst/>
-          </a:prstGeom>
-          <a:noFill/>
-        </p:spPr>
-        <p:txBody>
-          <a:bodyPr wrap="square" lIns="0" rIns="0" tIns="0" bIns="0" anchor="t">
-            <a:spAutoFit/>
-          </a:bodyPr>
+          <a:bodyPr rtlCol="0" anchor="t" wrap="square" lIns="110000" rIns="110000" tIns="95000" bIns="95000"/>
           <a:lstStyle/>
           <a:p>
             <a:pPr algn="l">
@@ -13172,34 +13066,14 @@
               <a:t>AI PM</a:t>
             </a:r>
           </a:p>
-        </p:txBody>
-      </p:sp>
-      <p:sp>
-        <p:nvSpPr>
-          <p:cNvPr id="6" name="TextBox 5"/>
-          <p:cNvSpPr txBox="1"/>
-          <p:nvPr/>
-        </p:nvSpPr>
-        <p:spPr>
-          <a:xfrm>
-            <a:off x="668640" y="2231640"/>
-            <a:ext cx="5192907" cy="1008780"/>
-          </a:xfrm>
-          <a:prstGeom prst="rect">
-            <a:avLst/>
-          </a:prstGeom>
-          <a:noFill/>
-        </p:spPr>
-        <p:txBody>
-          <a:bodyPr wrap="square" lIns="0" rIns="0" tIns="0" bIns="0" anchor="t">
-            <a:spAutoFit/>
-          </a:bodyPr>
-          <a:lstStyle/>
-          <a:p>
-            <a:pPr algn="l">
-              <a:lnSpc>
-                <a:spcPct val="125000"/>
-              </a:lnSpc>
+          <a:p>
+            <a:pPr algn="l">
+              <a:lnSpc>
+                <a:spcPct val="118000"/>
+              </a:lnSpc>
+              <a:spcBef>
+                <a:spcPts val="400"/>
+              </a:spcBef>
             </a:pPr>
             <a:r>
               <a:rPr sz="1500" b="0" i="0">
@@ -13214,8 +13088,11 @@
           <a:p>
             <a:pPr algn="l">
               <a:lnSpc>
-                <a:spcPct val="125000"/>
-              </a:lnSpc>
+                <a:spcPct val="118000"/>
+              </a:lnSpc>
+              <a:spcBef>
+                <a:spcPts val="400"/>
+              </a:spcBef>
             </a:pPr>
             <a:r>
               <a:rPr sz="1500" b="0" i="0">
@@ -13231,7 +13108,7 @@
       </p:sp>
       <p:sp>
         <p:nvSpPr>
-          <p:cNvPr id="7" name="Rounded Rectangle 6"/>
+          <p:cNvPr id="5" name="Rounded Rectangle 4"/>
           <p:cNvSpPr/>
           <p:nvPr/>
         </p:nvSpPr>
@@ -13270,33 +13147,7 @@
           </a:fontRef>
         </p:style>
         <p:txBody>
-          <a:bodyPr rtlCol="0" anchor="ctr"/>
-          <a:lstStyle/>
-          <a:p>
-            <a:pPr algn="ctr"/>
-          </a:p>
-        </p:txBody>
-      </p:sp>
-      <p:sp>
-        <p:nvSpPr>
-          <p:cNvPr id="8" name="TextBox 7"/>
-          <p:cNvSpPr txBox="1"/>
-          <p:nvPr/>
-        </p:nvSpPr>
-        <p:spPr>
-          <a:xfrm>
-            <a:off x="6330147" y="1811640"/>
-            <a:ext cx="5192907" cy="450000"/>
-          </a:xfrm>
-          <a:prstGeom prst="rect">
-            <a:avLst/>
-          </a:prstGeom>
-          <a:noFill/>
-        </p:spPr>
-        <p:txBody>
-          <a:bodyPr wrap="square" lIns="0" rIns="0" tIns="0" bIns="0" anchor="t">
-            <a:spAutoFit/>
-          </a:bodyPr>
+          <a:bodyPr rtlCol="0" anchor="t" wrap="square" lIns="110000" rIns="110000" tIns="95000" bIns="95000"/>
           <a:lstStyle/>
           <a:p>
             <a:pPr algn="l">
@@ -13314,34 +13165,14 @@
               <a:t>UX Builder</a:t>
             </a:r>
           </a:p>
-        </p:txBody>
-      </p:sp>
-      <p:sp>
-        <p:nvSpPr>
-          <p:cNvPr id="9" name="TextBox 8"/>
-          <p:cNvSpPr txBox="1"/>
-          <p:nvPr/>
-        </p:nvSpPr>
-        <p:spPr>
-          <a:xfrm>
-            <a:off x="6330147" y="2231640"/>
-            <a:ext cx="5192907" cy="1008780"/>
-          </a:xfrm>
-          <a:prstGeom prst="rect">
-            <a:avLst/>
-          </a:prstGeom>
-          <a:noFill/>
-        </p:spPr>
-        <p:txBody>
-          <a:bodyPr wrap="square" lIns="0" rIns="0" tIns="0" bIns="0" anchor="t">
-            <a:spAutoFit/>
-          </a:bodyPr>
-          <a:lstStyle/>
-          <a:p>
-            <a:pPr algn="l">
-              <a:lnSpc>
-                <a:spcPct val="125000"/>
-              </a:lnSpc>
+          <a:p>
+            <a:pPr algn="l">
+              <a:lnSpc>
+                <a:spcPct val="118000"/>
+              </a:lnSpc>
+              <a:spcBef>
+                <a:spcPts val="400"/>
+              </a:spcBef>
             </a:pPr>
             <a:r>
               <a:rPr sz="1500" b="0" i="0">
@@ -13356,8 +13187,11 @@
           <a:p>
             <a:pPr algn="l">
               <a:lnSpc>
-                <a:spcPct val="125000"/>
-              </a:lnSpc>
+                <a:spcPct val="118000"/>
+              </a:lnSpc>
+              <a:spcBef>
+                <a:spcPts val="400"/>
+              </a:spcBef>
             </a:pPr>
             <a:r>
               <a:rPr sz="1500" b="0" i="0">
@@ -13373,7 +13207,7 @@
       </p:sp>
       <p:sp>
         <p:nvSpPr>
-          <p:cNvPr id="10" name="Rounded Rectangle 9"/>
+          <p:cNvPr id="6" name="Rounded Rectangle 5"/>
           <p:cNvSpPr/>
           <p:nvPr/>
         </p:nvSpPr>
@@ -13412,33 +13246,7 @@
           </a:fontRef>
         </p:style>
         <p:txBody>
-          <a:bodyPr rtlCol="0" anchor="ctr"/>
-          <a:lstStyle/>
-          <a:p>
-            <a:pPr algn="ctr"/>
-          </a:p>
-        </p:txBody>
-      </p:sp>
-      <p:sp>
-        <p:nvSpPr>
-          <p:cNvPr id="11" name="TextBox 10"/>
-          <p:cNvSpPr txBox="1"/>
-          <p:nvPr/>
-        </p:nvSpPr>
-        <p:spPr>
-          <a:xfrm>
-            <a:off x="668640" y="3709020"/>
-            <a:ext cx="5192907" cy="450000"/>
-          </a:xfrm>
-          <a:prstGeom prst="rect">
-            <a:avLst/>
-          </a:prstGeom>
-          <a:noFill/>
-        </p:spPr>
-        <p:txBody>
-          <a:bodyPr wrap="square" lIns="0" rIns="0" tIns="0" bIns="0" anchor="t">
-            <a:spAutoFit/>
-          </a:bodyPr>
+          <a:bodyPr rtlCol="0" anchor="t" wrap="square" lIns="110000" rIns="110000" tIns="95000" bIns="95000"/>
           <a:lstStyle/>
           <a:p>
             <a:pPr algn="l">
@@ -13456,34 +13264,14 @@
               <a:t>Backend Engineer</a:t>
             </a:r>
           </a:p>
-        </p:txBody>
-      </p:sp>
-      <p:sp>
-        <p:nvSpPr>
-          <p:cNvPr id="12" name="TextBox 11"/>
-          <p:cNvSpPr txBox="1"/>
-          <p:nvPr/>
-        </p:nvSpPr>
-        <p:spPr>
-          <a:xfrm>
-            <a:off x="668640" y="4129020"/>
-            <a:ext cx="5192907" cy="1008780"/>
-          </a:xfrm>
-          <a:prstGeom prst="rect">
-            <a:avLst/>
-          </a:prstGeom>
-          <a:noFill/>
-        </p:spPr>
-        <p:txBody>
-          <a:bodyPr wrap="square" lIns="0" rIns="0" tIns="0" bIns="0" anchor="t">
-            <a:spAutoFit/>
-          </a:bodyPr>
-          <a:lstStyle/>
-          <a:p>
-            <a:pPr algn="l">
-              <a:lnSpc>
-                <a:spcPct val="125000"/>
-              </a:lnSpc>
+          <a:p>
+            <a:pPr algn="l">
+              <a:lnSpc>
+                <a:spcPct val="118000"/>
+              </a:lnSpc>
+              <a:spcBef>
+                <a:spcPts val="400"/>
+              </a:spcBef>
             </a:pPr>
             <a:r>
               <a:rPr sz="1500" b="0" i="0">
@@ -13498,8 +13286,11 @@
           <a:p>
             <a:pPr algn="l">
               <a:lnSpc>
-                <a:spcPct val="125000"/>
-              </a:lnSpc>
+                <a:spcPct val="118000"/>
+              </a:lnSpc>
+              <a:spcBef>
+                <a:spcPts val="400"/>
+              </a:spcBef>
             </a:pPr>
             <a:r>
               <a:rPr sz="1500" b="0" i="0">
@@ -13515,7 +13306,7 @@
       </p:sp>
       <p:sp>
         <p:nvSpPr>
-          <p:cNvPr id="13" name="Rounded Rectangle 12"/>
+          <p:cNvPr id="7" name="Rounded Rectangle 6"/>
           <p:cNvSpPr/>
           <p:nvPr/>
         </p:nvSpPr>
@@ -13554,23 +13345,74 @@
           </a:fontRef>
         </p:style>
         <p:txBody>
-          <a:bodyPr rtlCol="0" anchor="ctr"/>
-          <a:lstStyle/>
-          <a:p>
-            <a:pPr algn="ctr"/>
-          </a:p>
-        </p:txBody>
-      </p:sp>
-      <p:sp>
-        <p:nvSpPr>
-          <p:cNvPr id="14" name="TextBox 13"/>
+          <a:bodyPr rtlCol="0" anchor="t" wrap="square" lIns="110000" rIns="110000" tIns="95000" bIns="95000"/>
+          <a:lstStyle/>
+          <a:p>
+            <a:pPr algn="l">
+              <a:lnSpc>
+                <a:spcPct val="115000"/>
+              </a:lnSpc>
+            </a:pPr>
+            <a:r>
+              <a:rPr sz="1700" b="1" i="0">
+                <a:solidFill>
+                  <a:srgbClr val="111111"/>
+                </a:solidFill>
+                <a:latin typeface="Apple SD Gothic Neo"/>
+              </a:rPr>
+              <a:t>Quality Engineer</a:t>
+            </a:r>
+          </a:p>
+          <a:p>
+            <a:pPr algn="l">
+              <a:lnSpc>
+                <a:spcPct val="118000"/>
+              </a:lnSpc>
+              <a:spcBef>
+                <a:spcPts val="400"/>
+              </a:spcBef>
+            </a:pPr>
+            <a:r>
+              <a:rPr sz="1500" b="0" i="0">
+                <a:solidFill>
+                  <a:srgbClr val="333333"/>
+                </a:solidFill>
+                <a:latin typeface="Apple SD Gothic Neo"/>
+              </a:rPr>
+              <a:t>테스트, Edge case</a:t>
+            </a:r>
+          </a:p>
+          <a:p>
+            <a:pPr algn="l">
+              <a:lnSpc>
+                <a:spcPct val="118000"/>
+              </a:lnSpc>
+              <a:spcBef>
+                <a:spcPts val="400"/>
+              </a:spcBef>
+            </a:pPr>
+            <a:r>
+              <a:rPr sz="1500" b="0" i="0">
+                <a:solidFill>
+                  <a:srgbClr val="333333"/>
+                </a:solidFill>
+                <a:latin typeface="Apple SD Gothic Neo"/>
+              </a:rPr>
+              <a:t>리뷰 노트 담당</a:t>
+            </a:r>
+          </a:p>
+        </p:txBody>
+      </p:sp>
+      <p:sp>
+        <p:nvSpPr>
+          <p:cNvPr id="8" name="TextBox 7"/>
           <p:cNvSpPr txBox="1"/>
           <p:nvPr/>
         </p:nvSpPr>
         <p:spPr>
           <a:xfrm>
-            <a:off x="6330147" y="3709020"/>
-            <a:ext cx="5192907" cy="450000"/>
+            <a:off x="548640" y="6080760"/>
+            <a:ext cx="11094415" cy="457200"/>
           </a:xfrm>
           <a:prstGeom prst="rect">
             <a:avLst/>
@@ -13585,31 +13427,47 @@
           <a:p>
             <a:pPr algn="l">
               <a:lnSpc>
-                <a:spcPct val="115000"/>
-              </a:lnSpc>
-            </a:pPr>
-            <a:r>
-              <a:rPr sz="1700" b="1" i="0">
-                <a:solidFill>
-                  <a:srgbClr val="111111"/>
-                </a:solidFill>
-                <a:latin typeface="Apple SD Gothic Neo"/>
-              </a:rPr>
-              <a:t>Quality Engineer</a:t>
-            </a:r>
-          </a:p>
-        </p:txBody>
-      </p:sp>
-      <p:sp>
-        <p:nvSpPr>
-          <p:cNvPr id="15" name="TextBox 14"/>
+                <a:spcPct val="130000"/>
+              </a:lnSpc>
+            </a:pPr>
+            <a:r>
+              <a:rPr sz="1200" b="0" i="0">
+                <a:solidFill>
+                  <a:srgbClr val="333333"/>
+                </a:solidFill>
+                <a:latin typeface="Apple SD Gothic Neo"/>
+              </a:rPr>
+              <a:t>Claude Desktop에 프로젝트 폴더를 열고 claude/PROJECT_CONTEXT.md를 먼저 읽힌다</a:t>
+            </a:r>
+          </a:p>
+          <a:p>
+            <a:pPr algn="l">
+              <a:lnSpc>
+                <a:spcPct val="130000"/>
+              </a:lnSpc>
+            </a:pPr>
+            <a:r>
+              <a:rPr sz="1200" b="0" i="0">
+                <a:solidFill>
+                  <a:srgbClr val="333333"/>
+                </a:solidFill>
+                <a:latin typeface="Apple SD Gothic Neo"/>
+              </a:rPr>
+              <a:t>참고 — docs/13-ai-developer-intern-lab-plan.md</a:t>
+            </a:r>
+          </a:p>
+        </p:txBody>
+      </p:sp>
+      <p:sp>
+        <p:nvSpPr>
+          <p:cNvPr id="9" name="TextBox 8"/>
           <p:cNvSpPr txBox="1"/>
           <p:nvPr/>
         </p:nvSpPr>
         <p:spPr>
           <a:xfrm>
-            <a:off x="6330147" y="4129020"/>
-            <a:ext cx="5192907" cy="1008780"/>
+            <a:off x="548640" y="6492240"/>
+            <a:ext cx="5486400" cy="274320"/>
           </a:xfrm>
           <a:prstGeom prst="rect">
             <a:avLst/>
@@ -13624,126 +13482,16 @@
           <a:p>
             <a:pPr algn="l">
               <a:lnSpc>
-                <a:spcPct val="125000"/>
-              </a:lnSpc>
-            </a:pPr>
-            <a:r>
-              <a:rPr sz="1500" b="0" i="0">
+                <a:spcPct val="115000"/>
+              </a:lnSpc>
+            </a:pPr>
+            <a:r>
+              <a:rPr sz="1200" b="0" i="0">
                 <a:solidFill>
                   <a:srgbClr val="333333"/>
                 </a:solidFill>
                 <a:latin typeface="Apple SD Gothic Neo"/>
               </a:rPr>
-              <a:t>테스트, Edge case</a:t>
-            </a:r>
-          </a:p>
-          <a:p>
-            <a:pPr algn="l">
-              <a:lnSpc>
-                <a:spcPct val="125000"/>
-              </a:lnSpc>
-            </a:pPr>
-            <a:r>
-              <a:rPr sz="1500" b="0" i="0">
-                <a:solidFill>
-                  <a:srgbClr val="333333"/>
-                </a:solidFill>
-                <a:latin typeface="Apple SD Gothic Neo"/>
-              </a:rPr>
-              <a:t>리뷰 노트 담당</a:t>
-            </a:r>
-          </a:p>
-        </p:txBody>
-      </p:sp>
-      <p:sp>
-        <p:nvSpPr>
-          <p:cNvPr id="16" name="TextBox 15"/>
-          <p:cNvSpPr txBox="1"/>
-          <p:nvPr/>
-        </p:nvSpPr>
-        <p:spPr>
-          <a:xfrm>
-            <a:off x="548640" y="6080760"/>
-            <a:ext cx="11094415" cy="457200"/>
-          </a:xfrm>
-          <a:prstGeom prst="rect">
-            <a:avLst/>
-          </a:prstGeom>
-          <a:noFill/>
-        </p:spPr>
-        <p:txBody>
-          <a:bodyPr wrap="square" lIns="0" rIns="0" tIns="0" bIns="0" anchor="t">
-            <a:spAutoFit/>
-          </a:bodyPr>
-          <a:lstStyle/>
-          <a:p>
-            <a:pPr algn="l">
-              <a:lnSpc>
-                <a:spcPct val="130000"/>
-              </a:lnSpc>
-            </a:pPr>
-            <a:r>
-              <a:rPr sz="1200" b="0" i="0">
-                <a:solidFill>
-                  <a:srgbClr val="333333"/>
-                </a:solidFill>
-                <a:latin typeface="Apple SD Gothic Neo"/>
-              </a:rPr>
-              <a:t>Claude Desktop에 프로젝트 폴더를 열고 claude/PROJECT_CONTEXT.md를 먼저 읽힌다</a:t>
-            </a:r>
-          </a:p>
-          <a:p>
-            <a:pPr algn="l">
-              <a:lnSpc>
-                <a:spcPct val="130000"/>
-              </a:lnSpc>
-            </a:pPr>
-            <a:r>
-              <a:rPr sz="1200" b="0" i="0">
-                <a:solidFill>
-                  <a:srgbClr val="333333"/>
-                </a:solidFill>
-                <a:latin typeface="Apple SD Gothic Neo"/>
-              </a:rPr>
-              <a:t>참고 — docs/13-ai-developer-intern-lab-plan.md</a:t>
-            </a:r>
-          </a:p>
-        </p:txBody>
-      </p:sp>
-      <p:sp>
-        <p:nvSpPr>
-          <p:cNvPr id="17" name="TextBox 16"/>
-          <p:cNvSpPr txBox="1"/>
-          <p:nvPr/>
-        </p:nvSpPr>
-        <p:spPr>
-          <a:xfrm>
-            <a:off x="548640" y="6492240"/>
-            <a:ext cx="5486400" cy="274320"/>
-          </a:xfrm>
-          <a:prstGeom prst="rect">
-            <a:avLst/>
-          </a:prstGeom>
-          <a:noFill/>
-        </p:spPr>
-        <p:txBody>
-          <a:bodyPr wrap="square" lIns="0" rIns="0" tIns="0" bIns="0" anchor="t">
-            <a:spAutoFit/>
-          </a:bodyPr>
-          <a:lstStyle/>
-          <a:p>
-            <a:pPr algn="l">
-              <a:lnSpc>
-                <a:spcPct val="115000"/>
-              </a:lnSpc>
-            </a:pPr>
-            <a:r>
-              <a:rPr sz="1200" b="0" i="0">
-                <a:solidFill>
-                  <a:srgbClr val="333333"/>
-                </a:solidFill>
-                <a:latin typeface="Apple SD Gothic Neo"/>
-              </a:rPr>
               <a:t>개발자에서 AI Native로 · 서울AI재단 5시간 워크숍</a:t>
             </a:r>
           </a:p>
@@ -13751,7 +13499,7 @@
       </p:sp>
       <p:sp>
         <p:nvSpPr>
-          <p:cNvPr id="18" name="TextBox 17"/>
+          <p:cNvPr id="10" name="TextBox 9"/>
           <p:cNvSpPr txBox="1"/>
           <p:nvPr/>
         </p:nvSpPr>
@@ -15094,33 +14842,7 @@
           </a:fontRef>
         </p:style>
         <p:txBody>
-          <a:bodyPr rtlCol="0" anchor="ctr"/>
-          <a:lstStyle/>
-          <a:p>
-            <a:pPr algn="ctr"/>
-          </a:p>
-        </p:txBody>
-      </p:sp>
-      <p:sp>
-        <p:nvSpPr>
-          <p:cNvPr id="5" name="TextBox 4"/>
-          <p:cNvSpPr txBox="1"/>
-          <p:nvPr/>
-        </p:nvSpPr>
-        <p:spPr>
-          <a:xfrm>
-            <a:off x="668640" y="1811640"/>
-            <a:ext cx="3305738" cy="450000"/>
-          </a:xfrm>
-          <a:prstGeom prst="rect">
-            <a:avLst/>
-          </a:prstGeom>
-          <a:noFill/>
-        </p:spPr>
-        <p:txBody>
-          <a:bodyPr wrap="square" lIns="0" rIns="0" tIns="0" bIns="0" anchor="t">
-            <a:spAutoFit/>
-          </a:bodyPr>
+          <a:bodyPr rtlCol="0" anchor="t" wrap="square" lIns="110000" rIns="110000" tIns="95000" bIns="95000"/>
           <a:lstStyle/>
           <a:p>
             <a:pPr algn="l">
@@ -15138,34 +14860,14 @@
               <a:t>시민</a:t>
             </a:r>
           </a:p>
-        </p:txBody>
-      </p:sp>
-      <p:sp>
-        <p:nvSpPr>
-          <p:cNvPr id="6" name="TextBox 5"/>
-          <p:cNvSpPr txBox="1"/>
-          <p:nvPr/>
-        </p:nvSpPr>
-        <p:spPr>
-          <a:xfrm>
-            <a:off x="668640" y="2231640"/>
-            <a:ext cx="3305738" cy="2906160"/>
-          </a:xfrm>
-          <a:prstGeom prst="rect">
-            <a:avLst/>
-          </a:prstGeom>
-          <a:noFill/>
-        </p:spPr>
-        <p:txBody>
-          <a:bodyPr wrap="square" lIns="0" rIns="0" tIns="0" bIns="0" anchor="t">
-            <a:spAutoFit/>
-          </a:bodyPr>
-          <a:lstStyle/>
-          <a:p>
-            <a:pPr algn="l">
-              <a:lnSpc>
-                <a:spcPct val="125000"/>
-              </a:lnSpc>
+          <a:p>
+            <a:pPr algn="l">
+              <a:lnSpc>
+                <a:spcPct val="118000"/>
+              </a:lnSpc>
+              <a:spcBef>
+                <a:spcPts val="400"/>
+              </a:spcBef>
             </a:pPr>
             <a:r>
               <a:rPr sz="1500" b="0" i="0">
@@ -15181,7 +14883,7 @@
       </p:sp>
       <p:sp>
         <p:nvSpPr>
-          <p:cNvPr id="7" name="Rounded Rectangle 6"/>
+          <p:cNvPr id="5" name="Rounded Rectangle 4"/>
           <p:cNvSpPr/>
           <p:nvPr/>
         </p:nvSpPr>
@@ -15220,33 +14922,7 @@
           </a:fontRef>
         </p:style>
         <p:txBody>
-          <a:bodyPr rtlCol="0" anchor="ctr"/>
-          <a:lstStyle/>
-          <a:p>
-            <a:pPr algn="ctr"/>
-          </a:p>
-        </p:txBody>
-      </p:sp>
-      <p:sp>
-        <p:nvSpPr>
-          <p:cNvPr id="8" name="TextBox 7"/>
-          <p:cNvSpPr txBox="1"/>
-          <p:nvPr/>
-        </p:nvSpPr>
-        <p:spPr>
-          <a:xfrm>
-            <a:off x="4442978" y="1811640"/>
-            <a:ext cx="3305738" cy="450000"/>
-          </a:xfrm>
-          <a:prstGeom prst="rect">
-            <a:avLst/>
-          </a:prstGeom>
-          <a:noFill/>
-        </p:spPr>
-        <p:txBody>
-          <a:bodyPr wrap="square" lIns="0" rIns="0" tIns="0" bIns="0" anchor="t">
-            <a:spAutoFit/>
-          </a:bodyPr>
+          <a:bodyPr rtlCol="0" anchor="t" wrap="square" lIns="110000" rIns="110000" tIns="95000" bIns="95000"/>
           <a:lstStyle/>
           <a:p>
             <a:pPr algn="l">
@@ -15264,34 +14940,14 @@
               <a:t>운영자</a:t>
             </a:r>
           </a:p>
-        </p:txBody>
-      </p:sp>
-      <p:sp>
-        <p:nvSpPr>
-          <p:cNvPr id="9" name="TextBox 8"/>
-          <p:cNvSpPr txBox="1"/>
-          <p:nvPr/>
-        </p:nvSpPr>
-        <p:spPr>
-          <a:xfrm>
-            <a:off x="4442978" y="2231640"/>
-            <a:ext cx="3305738" cy="2906160"/>
-          </a:xfrm>
-          <a:prstGeom prst="rect">
-            <a:avLst/>
-          </a:prstGeom>
-          <a:noFill/>
-        </p:spPr>
-        <p:txBody>
-          <a:bodyPr wrap="square" lIns="0" rIns="0" tIns="0" bIns="0" anchor="t">
-            <a:spAutoFit/>
-          </a:bodyPr>
-          <a:lstStyle/>
-          <a:p>
-            <a:pPr algn="l">
-              <a:lnSpc>
-                <a:spcPct val="125000"/>
-              </a:lnSpc>
+          <a:p>
+            <a:pPr algn="l">
+              <a:lnSpc>
+                <a:spcPct val="118000"/>
+              </a:lnSpc>
+              <a:spcBef>
+                <a:spcPts val="400"/>
+              </a:spcBef>
             </a:pPr>
             <a:r>
               <a:rPr sz="1500" b="0" i="0">
@@ -15306,8 +14962,11 @@
           <a:p>
             <a:pPr algn="l">
               <a:lnSpc>
-                <a:spcPct val="125000"/>
-              </a:lnSpc>
+                <a:spcPct val="118000"/>
+              </a:lnSpc>
+              <a:spcBef>
+                <a:spcPts val="400"/>
+              </a:spcBef>
             </a:pPr>
             <a:r>
               <a:rPr sz="1500" b="0" i="0">
@@ -15323,7 +14982,7 @@
       </p:sp>
       <p:sp>
         <p:nvSpPr>
-          <p:cNvPr id="10" name="Rounded Rectangle 9"/>
+          <p:cNvPr id="6" name="Rounded Rectangle 5"/>
           <p:cNvSpPr/>
           <p:nvPr/>
         </p:nvSpPr>
@@ -15362,23 +15021,74 @@
           </a:fontRef>
         </p:style>
         <p:txBody>
-          <a:bodyPr rtlCol="0" anchor="ctr"/>
-          <a:lstStyle/>
-          <a:p>
-            <a:pPr algn="ctr"/>
-          </a:p>
-        </p:txBody>
-      </p:sp>
-      <p:sp>
-        <p:nvSpPr>
-          <p:cNvPr id="11" name="TextBox 10"/>
+          <a:bodyPr rtlCol="0" anchor="t" wrap="square" lIns="110000" rIns="110000" tIns="95000" bIns="95000"/>
+          <a:lstStyle/>
+          <a:p>
+            <a:pPr algn="l">
+              <a:lnSpc>
+                <a:spcPct val="115000"/>
+              </a:lnSpc>
+            </a:pPr>
+            <a:r>
+              <a:rPr sz="1700" b="1" i="0">
+                <a:solidFill>
+                  <a:srgbClr val="111111"/>
+                </a:solidFill>
+                <a:latin typeface="Apple SD Gothic Neo"/>
+              </a:rPr>
+              <a:t>관리자</a:t>
+            </a:r>
+          </a:p>
+          <a:p>
+            <a:pPr algn="l">
+              <a:lnSpc>
+                <a:spcPct val="118000"/>
+              </a:lnSpc>
+              <a:spcBef>
+                <a:spcPts val="400"/>
+              </a:spcBef>
+            </a:pPr>
+            <a:r>
+              <a:rPr sz="1500" b="0" i="0">
+                <a:solidFill>
+                  <a:srgbClr val="333333"/>
+                </a:solidFill>
+                <a:latin typeface="Apple SD Gothic Neo"/>
+              </a:rPr>
+              <a:t>처리량과 품질 편차</a:t>
+            </a:r>
+          </a:p>
+          <a:p>
+            <a:pPr algn="l">
+              <a:lnSpc>
+                <a:spcPct val="118000"/>
+              </a:lnSpc>
+              <a:spcBef>
+                <a:spcPts val="400"/>
+              </a:spcBef>
+            </a:pPr>
+            <a:r>
+              <a:rPr sz="1500" b="0" i="0">
+                <a:solidFill>
+                  <a:srgbClr val="333333"/>
+                </a:solidFill>
+                <a:latin typeface="Apple SD Gothic Neo"/>
+              </a:rPr>
+              <a:t>리스크 모니터링</a:t>
+            </a:r>
+          </a:p>
+        </p:txBody>
+      </p:sp>
+      <p:sp>
+        <p:nvSpPr>
+          <p:cNvPr id="7" name="TextBox 6"/>
           <p:cNvSpPr txBox="1"/>
           <p:nvPr/>
         </p:nvSpPr>
         <p:spPr>
           <a:xfrm>
-            <a:off x="8217316" y="1811640"/>
-            <a:ext cx="3305738" cy="450000"/>
+            <a:off x="548640" y="6080760"/>
+            <a:ext cx="11094415" cy="457200"/>
           </a:xfrm>
           <a:prstGeom prst="rect">
             <a:avLst/>
@@ -15393,31 +15103,31 @@
           <a:p>
             <a:pPr algn="l">
               <a:lnSpc>
-                <a:spcPct val="115000"/>
-              </a:lnSpc>
-            </a:pPr>
-            <a:r>
-              <a:rPr sz="1700" b="1" i="0">
-                <a:solidFill>
-                  <a:srgbClr val="111111"/>
-                </a:solidFill>
-                <a:latin typeface="Apple SD Gothic Neo"/>
-              </a:rPr>
-              <a:t>관리자</a:t>
-            </a:r>
-          </a:p>
-        </p:txBody>
-      </p:sp>
-      <p:sp>
-        <p:nvSpPr>
-          <p:cNvPr id="12" name="TextBox 11"/>
+                <a:spcPct val="130000"/>
+              </a:lnSpc>
+            </a:pPr>
+            <a:r>
+              <a:rPr sz="1200" b="0" i="0">
+                <a:solidFill>
+                  <a:srgbClr val="333333"/>
+                </a:solidFill>
+                <a:latin typeface="Apple SD Gothic Neo"/>
+              </a:rPr>
+              <a:t>문제 정의는 기능 목록이 아니라, 누가 어떤 불편을 겪는지 분리해서 보는 일</a:t>
+            </a:r>
+          </a:p>
+        </p:txBody>
+      </p:sp>
+      <p:sp>
+        <p:nvSpPr>
+          <p:cNvPr id="8" name="TextBox 7"/>
           <p:cNvSpPr txBox="1"/>
           <p:nvPr/>
         </p:nvSpPr>
         <p:spPr>
           <a:xfrm>
-            <a:off x="8217316" y="2231640"/>
-            <a:ext cx="3305738" cy="2906160"/>
+            <a:off x="548640" y="6492240"/>
+            <a:ext cx="5486400" cy="274320"/>
           </a:xfrm>
           <a:prstGeom prst="rect">
             <a:avLst/>
@@ -15432,110 +15142,16 @@
           <a:p>
             <a:pPr algn="l">
               <a:lnSpc>
-                <a:spcPct val="125000"/>
-              </a:lnSpc>
-            </a:pPr>
-            <a:r>
-              <a:rPr sz="1500" b="0" i="0">
+                <a:spcPct val="115000"/>
+              </a:lnSpc>
+            </a:pPr>
+            <a:r>
+              <a:rPr sz="1200" b="0" i="0">
                 <a:solidFill>
                   <a:srgbClr val="333333"/>
                 </a:solidFill>
                 <a:latin typeface="Apple SD Gothic Neo"/>
               </a:rPr>
-              <a:t>처리량과 품질 편차</a:t>
-            </a:r>
-          </a:p>
-          <a:p>
-            <a:pPr algn="l">
-              <a:lnSpc>
-                <a:spcPct val="125000"/>
-              </a:lnSpc>
-            </a:pPr>
-            <a:r>
-              <a:rPr sz="1500" b="0" i="0">
-                <a:solidFill>
-                  <a:srgbClr val="333333"/>
-                </a:solidFill>
-                <a:latin typeface="Apple SD Gothic Neo"/>
-              </a:rPr>
-              <a:t>리스크 모니터링</a:t>
-            </a:r>
-          </a:p>
-        </p:txBody>
-      </p:sp>
-      <p:sp>
-        <p:nvSpPr>
-          <p:cNvPr id="13" name="TextBox 12"/>
-          <p:cNvSpPr txBox="1"/>
-          <p:nvPr/>
-        </p:nvSpPr>
-        <p:spPr>
-          <a:xfrm>
-            <a:off x="548640" y="6080760"/>
-            <a:ext cx="11094415" cy="457200"/>
-          </a:xfrm>
-          <a:prstGeom prst="rect">
-            <a:avLst/>
-          </a:prstGeom>
-          <a:noFill/>
-        </p:spPr>
-        <p:txBody>
-          <a:bodyPr wrap="square" lIns="0" rIns="0" tIns="0" bIns="0" anchor="t">
-            <a:spAutoFit/>
-          </a:bodyPr>
-          <a:lstStyle/>
-          <a:p>
-            <a:pPr algn="l">
-              <a:lnSpc>
-                <a:spcPct val="130000"/>
-              </a:lnSpc>
-            </a:pPr>
-            <a:r>
-              <a:rPr sz="1200" b="0" i="0">
-                <a:solidFill>
-                  <a:srgbClr val="333333"/>
-                </a:solidFill>
-                <a:latin typeface="Apple SD Gothic Neo"/>
-              </a:rPr>
-              <a:t>문제 정의는 기능 목록이 아니라, 누가 어떤 불편을 겪는지 분리해서 보는 일</a:t>
-            </a:r>
-          </a:p>
-        </p:txBody>
-      </p:sp>
-      <p:sp>
-        <p:nvSpPr>
-          <p:cNvPr id="14" name="TextBox 13"/>
-          <p:cNvSpPr txBox="1"/>
-          <p:nvPr/>
-        </p:nvSpPr>
-        <p:spPr>
-          <a:xfrm>
-            <a:off x="548640" y="6492240"/>
-            <a:ext cx="5486400" cy="274320"/>
-          </a:xfrm>
-          <a:prstGeom prst="rect">
-            <a:avLst/>
-          </a:prstGeom>
-          <a:noFill/>
-        </p:spPr>
-        <p:txBody>
-          <a:bodyPr wrap="square" lIns="0" rIns="0" tIns="0" bIns="0" anchor="t">
-            <a:spAutoFit/>
-          </a:bodyPr>
-          <a:lstStyle/>
-          <a:p>
-            <a:pPr algn="l">
-              <a:lnSpc>
-                <a:spcPct val="115000"/>
-              </a:lnSpc>
-            </a:pPr>
-            <a:r>
-              <a:rPr sz="1200" b="0" i="0">
-                <a:solidFill>
-                  <a:srgbClr val="333333"/>
-                </a:solidFill>
-                <a:latin typeface="Apple SD Gothic Neo"/>
-              </a:rPr>
               <a:t>개발자에서 AI Native로 · 서울AI재단 5시간 워크숍</a:t>
             </a:r>
           </a:p>
@@ -15543,7 +15159,7 @@
       </p:sp>
       <p:sp>
         <p:nvSpPr>
-          <p:cNvPr id="15" name="TextBox 14"/>
+          <p:cNvPr id="9" name="TextBox 8"/>
           <p:cNvSpPr txBox="1"/>
           <p:nvPr/>
         </p:nvSpPr>
@@ -17041,8 +16657,8 @@
         </p:nvSpPr>
         <p:spPr>
           <a:xfrm>
-            <a:off x="6278727" y="1737360"/>
-            <a:ext cx="5364327" cy="1005840"/>
+            <a:off x="6278727" y="1600200"/>
+            <a:ext cx="5364327" cy="1081278"/>
           </a:xfrm>
           <a:prstGeom prst="roundRect">
             <a:avLst>
@@ -17074,33 +16690,7 @@
           </a:fontRef>
         </p:style>
         <p:txBody>
-          <a:bodyPr rtlCol="0" anchor="ctr"/>
-          <a:lstStyle/>
-          <a:p>
-            <a:pPr algn="ctr"/>
-          </a:p>
-        </p:txBody>
-      </p:sp>
-      <p:sp>
-        <p:nvSpPr>
-          <p:cNvPr id="6" name="TextBox 5"/>
-          <p:cNvSpPr txBox="1"/>
-          <p:nvPr/>
-        </p:nvSpPr>
-        <p:spPr>
-          <a:xfrm>
-            <a:off x="6398727" y="1857360"/>
-            <a:ext cx="5124327" cy="450000"/>
-          </a:xfrm>
-          <a:prstGeom prst="rect">
-            <a:avLst/>
-          </a:prstGeom>
-          <a:noFill/>
-        </p:spPr>
-        <p:txBody>
-          <a:bodyPr wrap="square" lIns="0" rIns="0" tIns="0" bIns="0" anchor="t">
-            <a:spAutoFit/>
-          </a:bodyPr>
+          <a:bodyPr rtlCol="0" anchor="t" wrap="square" lIns="110000" rIns="110000" tIns="95000" bIns="95000"/>
           <a:lstStyle/>
           <a:p>
             <a:pPr algn="l">
@@ -17118,34 +16708,14 @@
               <a:t>ML</a:t>
             </a:r>
           </a:p>
-        </p:txBody>
-      </p:sp>
-      <p:sp>
-        <p:nvSpPr>
-          <p:cNvPr id="7" name="TextBox 6"/>
-          <p:cNvSpPr txBox="1"/>
-          <p:nvPr/>
-        </p:nvSpPr>
-        <p:spPr>
-          <a:xfrm>
-            <a:off x="6398727" y="2277360"/>
-            <a:ext cx="5124327" cy="345840"/>
-          </a:xfrm>
-          <a:prstGeom prst="rect">
-            <a:avLst/>
-          </a:prstGeom>
-          <a:noFill/>
-        </p:spPr>
-        <p:txBody>
-          <a:bodyPr wrap="square" lIns="0" rIns="0" tIns="0" bIns="0" anchor="t">
-            <a:spAutoFit/>
-          </a:bodyPr>
-          <a:lstStyle/>
-          <a:p>
-            <a:pPr algn="l">
-              <a:lnSpc>
-                <a:spcPct val="125000"/>
-              </a:lnSpc>
+          <a:p>
+            <a:pPr algn="l">
+              <a:lnSpc>
+                <a:spcPct val="118000"/>
+              </a:lnSpc>
+              <a:spcBef>
+                <a:spcPts val="400"/>
+              </a:spcBef>
             </a:pPr>
             <a:r>
               <a:rPr sz="1500" b="0" i="0">
@@ -17160,8 +16730,11 @@
           <a:p>
             <a:pPr algn="l">
               <a:lnSpc>
-                <a:spcPct val="125000"/>
-              </a:lnSpc>
+                <a:spcPct val="118000"/>
+              </a:lnSpc>
+              <a:spcBef>
+                <a:spcPts val="400"/>
+              </a:spcBef>
             </a:pPr>
             <a:r>
               <a:rPr sz="1500" b="0" i="0">
@@ -17177,14 +16750,14 @@
       </p:sp>
       <p:sp>
         <p:nvSpPr>
-          <p:cNvPr id="8" name="Rounded Rectangle 7"/>
+          <p:cNvPr id="6" name="Rounded Rectangle 5"/>
           <p:cNvSpPr/>
           <p:nvPr/>
         </p:nvSpPr>
         <p:spPr>
           <a:xfrm>
-            <a:off x="6278727" y="2926080"/>
-            <a:ext cx="5364327" cy="1005840"/>
+            <a:off x="6278727" y="2809494"/>
+            <a:ext cx="5364327" cy="1081278"/>
           </a:xfrm>
           <a:prstGeom prst="roundRect">
             <a:avLst>
@@ -17216,33 +16789,7 @@
           </a:fontRef>
         </p:style>
         <p:txBody>
-          <a:bodyPr rtlCol="0" anchor="ctr"/>
-          <a:lstStyle/>
-          <a:p>
-            <a:pPr algn="ctr"/>
-          </a:p>
-        </p:txBody>
-      </p:sp>
-      <p:sp>
-        <p:nvSpPr>
-          <p:cNvPr id="9" name="TextBox 8"/>
-          <p:cNvSpPr txBox="1"/>
-          <p:nvPr/>
-        </p:nvSpPr>
-        <p:spPr>
-          <a:xfrm>
-            <a:off x="6398727" y="3046080"/>
-            <a:ext cx="5124327" cy="450000"/>
-          </a:xfrm>
-          <a:prstGeom prst="rect">
-            <a:avLst/>
-          </a:prstGeom>
-          <a:noFill/>
-        </p:spPr>
-        <p:txBody>
-          <a:bodyPr wrap="square" lIns="0" rIns="0" tIns="0" bIns="0" anchor="t">
-            <a:spAutoFit/>
-          </a:bodyPr>
+          <a:bodyPr rtlCol="0" anchor="t" wrap="square" lIns="110000" rIns="110000" tIns="95000" bIns="95000"/>
           <a:lstStyle/>
           <a:p>
             <a:pPr algn="l">
@@ -17260,34 +16807,14 @@
               <a:t>DL</a:t>
             </a:r>
           </a:p>
-        </p:txBody>
-      </p:sp>
-      <p:sp>
-        <p:nvSpPr>
-          <p:cNvPr id="10" name="TextBox 9"/>
-          <p:cNvSpPr txBox="1"/>
-          <p:nvPr/>
-        </p:nvSpPr>
-        <p:spPr>
-          <a:xfrm>
-            <a:off x="6398727" y="3466080"/>
-            <a:ext cx="5124327" cy="345840"/>
-          </a:xfrm>
-          <a:prstGeom prst="rect">
-            <a:avLst/>
-          </a:prstGeom>
-          <a:noFill/>
-        </p:spPr>
-        <p:txBody>
-          <a:bodyPr wrap="square" lIns="0" rIns="0" tIns="0" bIns="0" anchor="t">
-            <a:spAutoFit/>
-          </a:bodyPr>
-          <a:lstStyle/>
-          <a:p>
-            <a:pPr algn="l">
-              <a:lnSpc>
-                <a:spcPct val="125000"/>
-              </a:lnSpc>
+          <a:p>
+            <a:pPr algn="l">
+              <a:lnSpc>
+                <a:spcPct val="118000"/>
+              </a:lnSpc>
+              <a:spcBef>
+                <a:spcPts val="400"/>
+              </a:spcBef>
             </a:pPr>
             <a:r>
               <a:rPr sz="1500" b="0" i="0">
@@ -17302,8 +16829,11 @@
           <a:p>
             <a:pPr algn="l">
               <a:lnSpc>
-                <a:spcPct val="125000"/>
-              </a:lnSpc>
+                <a:spcPct val="118000"/>
+              </a:lnSpc>
+              <a:spcBef>
+                <a:spcPts val="400"/>
+              </a:spcBef>
             </a:pPr>
             <a:r>
               <a:rPr sz="1500" b="0" i="0">
@@ -17319,14 +16849,14 @@
       </p:sp>
       <p:sp>
         <p:nvSpPr>
-          <p:cNvPr id="11" name="Rounded Rectangle 10"/>
+          <p:cNvPr id="7" name="Rounded Rectangle 6"/>
           <p:cNvSpPr/>
           <p:nvPr/>
         </p:nvSpPr>
         <p:spPr>
           <a:xfrm>
-            <a:off x="6278727" y="4114800"/>
-            <a:ext cx="5364327" cy="1005840"/>
+            <a:off x="6278727" y="4018788"/>
+            <a:ext cx="5364327" cy="1081278"/>
           </a:xfrm>
           <a:prstGeom prst="roundRect">
             <a:avLst>
@@ -17358,33 +16888,7 @@
           </a:fontRef>
         </p:style>
         <p:txBody>
-          <a:bodyPr rtlCol="0" anchor="ctr"/>
-          <a:lstStyle/>
-          <a:p>
-            <a:pPr algn="ctr"/>
-          </a:p>
-        </p:txBody>
-      </p:sp>
-      <p:sp>
-        <p:nvSpPr>
-          <p:cNvPr id="12" name="TextBox 11"/>
-          <p:cNvSpPr txBox="1"/>
-          <p:nvPr/>
-        </p:nvSpPr>
-        <p:spPr>
-          <a:xfrm>
-            <a:off x="6398727" y="4234800"/>
-            <a:ext cx="5124327" cy="450000"/>
-          </a:xfrm>
-          <a:prstGeom prst="rect">
-            <a:avLst/>
-          </a:prstGeom>
-          <a:noFill/>
-        </p:spPr>
-        <p:txBody>
-          <a:bodyPr wrap="square" lIns="0" rIns="0" tIns="0" bIns="0" anchor="t">
-            <a:spAutoFit/>
-          </a:bodyPr>
+          <a:bodyPr rtlCol="0" anchor="t" wrap="square" lIns="110000" rIns="110000" tIns="95000" bIns="95000"/>
           <a:lstStyle/>
           <a:p>
             <a:pPr algn="l">
@@ -17402,34 +16906,14 @@
               <a:t>LLM</a:t>
             </a:r>
           </a:p>
-        </p:txBody>
-      </p:sp>
-      <p:sp>
-        <p:nvSpPr>
-          <p:cNvPr id="13" name="TextBox 12"/>
-          <p:cNvSpPr txBox="1"/>
-          <p:nvPr/>
-        </p:nvSpPr>
-        <p:spPr>
-          <a:xfrm>
-            <a:off x="6398727" y="4654800"/>
-            <a:ext cx="5124327" cy="345840"/>
-          </a:xfrm>
-          <a:prstGeom prst="rect">
-            <a:avLst/>
-          </a:prstGeom>
-          <a:noFill/>
-        </p:spPr>
-        <p:txBody>
-          <a:bodyPr wrap="square" lIns="0" rIns="0" tIns="0" bIns="0" anchor="t">
-            <a:spAutoFit/>
-          </a:bodyPr>
-          <a:lstStyle/>
-          <a:p>
-            <a:pPr algn="l">
-              <a:lnSpc>
-                <a:spcPct val="125000"/>
-              </a:lnSpc>
+          <a:p>
+            <a:pPr algn="l">
+              <a:lnSpc>
+                <a:spcPct val="118000"/>
+              </a:lnSpc>
+              <a:spcBef>
+                <a:spcPts val="400"/>
+              </a:spcBef>
             </a:pPr>
             <a:r>
               <a:rPr sz="1500" b="0" i="0">
@@ -17444,8 +16928,11 @@
           <a:p>
             <a:pPr algn="l">
               <a:lnSpc>
-                <a:spcPct val="125000"/>
-              </a:lnSpc>
+                <a:spcPct val="118000"/>
+              </a:lnSpc>
+              <a:spcBef>
+                <a:spcPts val="400"/>
+              </a:spcBef>
             </a:pPr>
             <a:r>
               <a:rPr sz="1500" b="0" i="0">
@@ -17461,14 +16948,14 @@
       </p:sp>
       <p:sp>
         <p:nvSpPr>
-          <p:cNvPr id="14" name="Rounded Rectangle 13"/>
+          <p:cNvPr id="8" name="Rounded Rectangle 7"/>
           <p:cNvSpPr/>
           <p:nvPr/>
         </p:nvSpPr>
         <p:spPr>
           <a:xfrm>
-            <a:off x="6278727" y="5303520"/>
-            <a:ext cx="5364327" cy="1005840"/>
+            <a:off x="6278727" y="5228082"/>
+            <a:ext cx="5364327" cy="1081278"/>
           </a:xfrm>
           <a:prstGeom prst="roundRect">
             <a:avLst>
@@ -17500,23 +16987,74 @@
           </a:fontRef>
         </p:style>
         <p:txBody>
-          <a:bodyPr rtlCol="0" anchor="ctr"/>
-          <a:lstStyle/>
-          <a:p>
-            <a:pPr algn="ctr"/>
-          </a:p>
-        </p:txBody>
-      </p:sp>
-      <p:sp>
-        <p:nvSpPr>
-          <p:cNvPr id="15" name="TextBox 14"/>
+          <a:bodyPr rtlCol="0" anchor="t" wrap="square" lIns="110000" rIns="110000" tIns="95000" bIns="95000"/>
+          <a:lstStyle/>
+          <a:p>
+            <a:pPr algn="l">
+              <a:lnSpc>
+                <a:spcPct val="115000"/>
+              </a:lnSpc>
+            </a:pPr>
+            <a:r>
+              <a:rPr sz="1700" b="1" i="0">
+                <a:solidFill>
+                  <a:srgbClr val="123C7C"/>
+                </a:solidFill>
+                <a:latin typeface="Apple SD Gothic Neo"/>
+              </a:rPr>
+              <a:t>Agent</a:t>
+            </a:r>
+          </a:p>
+          <a:p>
+            <a:pPr algn="l">
+              <a:lnSpc>
+                <a:spcPct val="118000"/>
+              </a:lnSpc>
+              <a:spcBef>
+                <a:spcPts val="400"/>
+              </a:spcBef>
+            </a:pPr>
+            <a:r>
+              <a:rPr sz="1500" b="0" i="0">
+                <a:solidFill>
+                  <a:srgbClr val="333333"/>
+                </a:solidFill>
+                <a:latin typeface="Apple SD Gothic Neo"/>
+              </a:rPr>
+              <a:t>Agentic AI PM</a:t>
+            </a:r>
+          </a:p>
+          <a:p>
+            <a:pPr algn="l">
+              <a:lnSpc>
+                <a:spcPct val="118000"/>
+              </a:lnSpc>
+              <a:spcBef>
+                <a:spcPts val="400"/>
+              </a:spcBef>
+            </a:pPr>
+            <a:r>
+              <a:rPr sz="1500" b="0" i="0">
+                <a:solidFill>
+                  <a:srgbClr val="333333"/>
+                </a:solidFill>
+                <a:latin typeface="Apple SD Gothic Neo"/>
+              </a:rPr>
+              <a:t>무신사 (현재)</a:t>
+            </a:r>
+          </a:p>
+        </p:txBody>
+      </p:sp>
+      <p:sp>
+        <p:nvSpPr>
+          <p:cNvPr id="9" name="TextBox 8"/>
           <p:cNvSpPr txBox="1"/>
           <p:nvPr/>
         </p:nvSpPr>
         <p:spPr>
           <a:xfrm>
-            <a:off x="6398727" y="5423520"/>
-            <a:ext cx="5124327" cy="450000"/>
+            <a:off x="548640" y="6492240"/>
+            <a:ext cx="5486400" cy="274320"/>
           </a:xfrm>
           <a:prstGeom prst="rect">
             <a:avLst/>
@@ -17535,106 +17073,12 @@
               </a:lnSpc>
             </a:pPr>
             <a:r>
-              <a:rPr sz="1700" b="1" i="0">
-                <a:solidFill>
-                  <a:srgbClr val="123C7C"/>
-                </a:solidFill>
-                <a:latin typeface="Apple SD Gothic Neo"/>
-              </a:rPr>
-              <a:t>Agent</a:t>
-            </a:r>
-          </a:p>
-        </p:txBody>
-      </p:sp>
-      <p:sp>
-        <p:nvSpPr>
-          <p:cNvPr id="16" name="TextBox 15"/>
-          <p:cNvSpPr txBox="1"/>
-          <p:nvPr/>
-        </p:nvSpPr>
-        <p:spPr>
-          <a:xfrm>
-            <a:off x="6398727" y="5843520"/>
-            <a:ext cx="5124327" cy="345840"/>
-          </a:xfrm>
-          <a:prstGeom prst="rect">
-            <a:avLst/>
-          </a:prstGeom>
-          <a:noFill/>
-        </p:spPr>
-        <p:txBody>
-          <a:bodyPr wrap="square" lIns="0" rIns="0" tIns="0" bIns="0" anchor="t">
-            <a:spAutoFit/>
-          </a:bodyPr>
-          <a:lstStyle/>
-          <a:p>
-            <a:pPr algn="l">
-              <a:lnSpc>
-                <a:spcPct val="125000"/>
-              </a:lnSpc>
-            </a:pPr>
-            <a:r>
-              <a:rPr sz="1500" b="0" i="0">
+              <a:rPr sz="1200" b="0" i="0">
                 <a:solidFill>
                   <a:srgbClr val="333333"/>
                 </a:solidFill>
                 <a:latin typeface="Apple SD Gothic Neo"/>
               </a:rPr>
-              <a:t>Agentic AI PM</a:t>
-            </a:r>
-          </a:p>
-          <a:p>
-            <a:pPr algn="l">
-              <a:lnSpc>
-                <a:spcPct val="125000"/>
-              </a:lnSpc>
-            </a:pPr>
-            <a:r>
-              <a:rPr sz="1500" b="0" i="0">
-                <a:solidFill>
-                  <a:srgbClr val="333333"/>
-                </a:solidFill>
-                <a:latin typeface="Apple SD Gothic Neo"/>
-              </a:rPr>
-              <a:t>무신사 (현재)</a:t>
-            </a:r>
-          </a:p>
-        </p:txBody>
-      </p:sp>
-      <p:sp>
-        <p:nvSpPr>
-          <p:cNvPr id="17" name="TextBox 16"/>
-          <p:cNvSpPr txBox="1"/>
-          <p:nvPr/>
-        </p:nvSpPr>
-        <p:spPr>
-          <a:xfrm>
-            <a:off x="548640" y="6492240"/>
-            <a:ext cx="5486400" cy="274320"/>
-          </a:xfrm>
-          <a:prstGeom prst="rect">
-            <a:avLst/>
-          </a:prstGeom>
-          <a:noFill/>
-        </p:spPr>
-        <p:txBody>
-          <a:bodyPr wrap="square" lIns="0" rIns="0" tIns="0" bIns="0" anchor="t">
-            <a:spAutoFit/>
-          </a:bodyPr>
-          <a:lstStyle/>
-          <a:p>
-            <a:pPr algn="l">
-              <a:lnSpc>
-                <a:spcPct val="115000"/>
-              </a:lnSpc>
-            </a:pPr>
-            <a:r>
-              <a:rPr sz="1200" b="0" i="0">
-                <a:solidFill>
-                  <a:srgbClr val="333333"/>
-                </a:solidFill>
-                <a:latin typeface="Apple SD Gothic Neo"/>
-              </a:rPr>
               <a:t>개발자에서 AI Native로 · 서울AI재단 5시간 워크숍</a:t>
             </a:r>
           </a:p>
@@ -17642,7 +17086,7 @@
       </p:sp>
       <p:sp>
         <p:nvSpPr>
-          <p:cNvPr id="18" name="TextBox 17"/>
+          <p:cNvPr id="10" name="TextBox 9"/>
           <p:cNvSpPr txBox="1"/>
           <p:nvPr/>
         </p:nvSpPr>
@@ -18993,33 +18437,7 @@
           </a:fontRef>
         </p:style>
         <p:txBody>
-          <a:bodyPr rtlCol="0" anchor="ctr"/>
-          <a:lstStyle/>
-          <a:p>
-            <a:pPr algn="ctr"/>
-          </a:p>
-        </p:txBody>
-      </p:sp>
-      <p:sp>
-        <p:nvSpPr>
-          <p:cNvPr id="5" name="TextBox 4"/>
-          <p:cNvSpPr txBox="1"/>
-          <p:nvPr/>
-        </p:nvSpPr>
-        <p:spPr>
-          <a:xfrm>
-            <a:off x="668640" y="1811640"/>
-            <a:ext cx="3305738" cy="450000"/>
-          </a:xfrm>
-          <a:prstGeom prst="rect">
-            <a:avLst/>
-          </a:prstGeom>
-          <a:noFill/>
-        </p:spPr>
-        <p:txBody>
-          <a:bodyPr wrap="square" lIns="0" rIns="0" tIns="0" bIns="0" anchor="t">
-            <a:spAutoFit/>
-          </a:bodyPr>
+          <a:bodyPr rtlCol="0" anchor="t" wrap="square" lIns="110000" rIns="110000" tIns="95000" bIns="95000"/>
           <a:lstStyle/>
           <a:p>
             <a:pPr algn="l">
@@ -19037,34 +18455,14 @@
               <a:t>문제 정의</a:t>
             </a:r>
           </a:p>
-        </p:txBody>
-      </p:sp>
-      <p:sp>
-        <p:nvSpPr>
-          <p:cNvPr id="6" name="TextBox 5"/>
-          <p:cNvSpPr txBox="1"/>
-          <p:nvPr/>
-        </p:nvSpPr>
-        <p:spPr>
-          <a:xfrm>
-            <a:off x="668640" y="2231640"/>
-            <a:ext cx="3305738" cy="1008780"/>
-          </a:xfrm>
-          <a:prstGeom prst="rect">
-            <a:avLst/>
-          </a:prstGeom>
-          <a:noFill/>
-        </p:spPr>
-        <p:txBody>
-          <a:bodyPr wrap="square" lIns="0" rIns="0" tIns="0" bIns="0" anchor="t">
-            <a:spAutoFit/>
-          </a:bodyPr>
-          <a:lstStyle/>
-          <a:p>
-            <a:pPr algn="l">
-              <a:lnSpc>
-                <a:spcPct val="125000"/>
-              </a:lnSpc>
+          <a:p>
+            <a:pPr algn="l">
+              <a:lnSpc>
+                <a:spcPct val="118000"/>
+              </a:lnSpc>
+              <a:spcBef>
+                <a:spcPts val="400"/>
+              </a:spcBef>
             </a:pPr>
             <a:r>
               <a:rPr sz="1500" b="0" i="0">
@@ -19080,7 +18478,7 @@
       </p:sp>
       <p:sp>
         <p:nvSpPr>
-          <p:cNvPr id="7" name="Rounded Rectangle 6"/>
+          <p:cNvPr id="5" name="Rounded Rectangle 4"/>
           <p:cNvSpPr/>
           <p:nvPr/>
         </p:nvSpPr>
@@ -19119,33 +18517,7 @@
           </a:fontRef>
         </p:style>
         <p:txBody>
-          <a:bodyPr rtlCol="0" anchor="ctr"/>
-          <a:lstStyle/>
-          <a:p>
-            <a:pPr algn="ctr"/>
-          </a:p>
-        </p:txBody>
-      </p:sp>
-      <p:sp>
-        <p:nvSpPr>
-          <p:cNvPr id="8" name="TextBox 7"/>
-          <p:cNvSpPr txBox="1"/>
-          <p:nvPr/>
-        </p:nvSpPr>
-        <p:spPr>
-          <a:xfrm>
-            <a:off x="4442978" y="1811640"/>
-            <a:ext cx="3305738" cy="450000"/>
-          </a:xfrm>
-          <a:prstGeom prst="rect">
-            <a:avLst/>
-          </a:prstGeom>
-          <a:noFill/>
-        </p:spPr>
-        <p:txBody>
-          <a:bodyPr wrap="square" lIns="0" rIns="0" tIns="0" bIns="0" anchor="t">
-            <a:spAutoFit/>
-          </a:bodyPr>
+          <a:bodyPr rtlCol="0" anchor="t" wrap="square" lIns="110000" rIns="110000" tIns="95000" bIns="95000"/>
           <a:lstStyle/>
           <a:p>
             <a:pPr algn="l">
@@ -19163,34 +18535,14 @@
               <a:t>사용자</a:t>
             </a:r>
           </a:p>
-        </p:txBody>
-      </p:sp>
-      <p:sp>
-        <p:nvSpPr>
-          <p:cNvPr id="9" name="TextBox 8"/>
-          <p:cNvSpPr txBox="1"/>
-          <p:nvPr/>
-        </p:nvSpPr>
-        <p:spPr>
-          <a:xfrm>
-            <a:off x="4442978" y="2231640"/>
-            <a:ext cx="3305738" cy="1008780"/>
-          </a:xfrm>
-          <a:prstGeom prst="rect">
-            <a:avLst/>
-          </a:prstGeom>
-          <a:noFill/>
-        </p:spPr>
-        <p:txBody>
-          <a:bodyPr wrap="square" lIns="0" rIns="0" tIns="0" bIns="0" anchor="t">
-            <a:spAutoFit/>
-          </a:bodyPr>
-          <a:lstStyle/>
-          <a:p>
-            <a:pPr algn="l">
-              <a:lnSpc>
-                <a:spcPct val="125000"/>
-              </a:lnSpc>
+          <a:p>
+            <a:pPr algn="l">
+              <a:lnSpc>
+                <a:spcPct val="118000"/>
+              </a:lnSpc>
+              <a:spcBef>
+                <a:spcPts val="400"/>
+              </a:spcBef>
             </a:pPr>
             <a:r>
               <a:rPr sz="1500" b="0" i="0">
@@ -19206,7 +18558,7 @@
       </p:sp>
       <p:sp>
         <p:nvSpPr>
-          <p:cNvPr id="10" name="Rounded Rectangle 9"/>
+          <p:cNvPr id="6" name="Rounded Rectangle 5"/>
           <p:cNvSpPr/>
           <p:nvPr/>
         </p:nvSpPr>
@@ -19245,33 +18597,7 @@
           </a:fontRef>
         </p:style>
         <p:txBody>
-          <a:bodyPr rtlCol="0" anchor="ctr"/>
-          <a:lstStyle/>
-          <a:p>
-            <a:pPr algn="ctr"/>
-          </a:p>
-        </p:txBody>
-      </p:sp>
-      <p:sp>
-        <p:nvSpPr>
-          <p:cNvPr id="11" name="TextBox 10"/>
-          <p:cNvSpPr txBox="1"/>
-          <p:nvPr/>
-        </p:nvSpPr>
-        <p:spPr>
-          <a:xfrm>
-            <a:off x="8217316" y="1811640"/>
-            <a:ext cx="3305738" cy="450000"/>
-          </a:xfrm>
-          <a:prstGeom prst="rect">
-            <a:avLst/>
-          </a:prstGeom>
-          <a:noFill/>
-        </p:spPr>
-        <p:txBody>
-          <a:bodyPr wrap="square" lIns="0" rIns="0" tIns="0" bIns="0" anchor="t">
-            <a:spAutoFit/>
-          </a:bodyPr>
+          <a:bodyPr rtlCol="0" anchor="t" wrap="square" lIns="110000" rIns="110000" tIns="95000" bIns="95000"/>
           <a:lstStyle/>
           <a:p>
             <a:pPr algn="l">
@@ -19289,34 +18615,14 @@
               <a:t>핵심 기능</a:t>
             </a:r>
           </a:p>
-        </p:txBody>
-      </p:sp>
-      <p:sp>
-        <p:nvSpPr>
-          <p:cNvPr id="12" name="TextBox 11"/>
-          <p:cNvSpPr txBox="1"/>
-          <p:nvPr/>
-        </p:nvSpPr>
-        <p:spPr>
-          <a:xfrm>
-            <a:off x="8217316" y="2231640"/>
-            <a:ext cx="3305738" cy="1008780"/>
-          </a:xfrm>
-          <a:prstGeom prst="rect">
-            <a:avLst/>
-          </a:prstGeom>
-          <a:noFill/>
-        </p:spPr>
-        <p:txBody>
-          <a:bodyPr wrap="square" lIns="0" rIns="0" tIns="0" bIns="0" anchor="t">
-            <a:spAutoFit/>
-          </a:bodyPr>
-          <a:lstStyle/>
-          <a:p>
-            <a:pPr algn="l">
-              <a:lnSpc>
-                <a:spcPct val="125000"/>
-              </a:lnSpc>
+          <a:p>
+            <a:pPr algn="l">
+              <a:lnSpc>
+                <a:spcPct val="118000"/>
+              </a:lnSpc>
+              <a:spcBef>
+                <a:spcPts val="400"/>
+              </a:spcBef>
             </a:pPr>
             <a:r>
               <a:rPr sz="1500" b="0" i="0">
@@ -19332,7 +18638,7 @@
       </p:sp>
       <p:sp>
         <p:nvSpPr>
-          <p:cNvPr id="13" name="Rounded Rectangle 12"/>
+          <p:cNvPr id="7" name="Rounded Rectangle 6"/>
           <p:cNvSpPr/>
           <p:nvPr/>
         </p:nvSpPr>
@@ -19371,33 +18677,7 @@
           </a:fontRef>
         </p:style>
         <p:txBody>
-          <a:bodyPr rtlCol="0" anchor="ctr"/>
-          <a:lstStyle/>
-          <a:p>
-            <a:pPr algn="ctr"/>
-          </a:p>
-        </p:txBody>
-      </p:sp>
-      <p:sp>
-        <p:nvSpPr>
-          <p:cNvPr id="14" name="TextBox 13"/>
-          <p:cNvSpPr txBox="1"/>
-          <p:nvPr/>
-        </p:nvSpPr>
-        <p:spPr>
-          <a:xfrm>
-            <a:off x="668640" y="3709020"/>
-            <a:ext cx="3305738" cy="450000"/>
-          </a:xfrm>
-          <a:prstGeom prst="rect">
-            <a:avLst/>
-          </a:prstGeom>
-          <a:noFill/>
-        </p:spPr>
-        <p:txBody>
-          <a:bodyPr wrap="square" lIns="0" rIns="0" tIns="0" bIns="0" anchor="t">
-            <a:spAutoFit/>
-          </a:bodyPr>
+          <a:bodyPr rtlCol="0" anchor="t" wrap="square" lIns="110000" rIns="110000" tIns="95000" bIns="95000"/>
           <a:lstStyle/>
           <a:p>
             <a:pPr algn="l">
@@ -19415,34 +18695,14 @@
               <a:t>비목표</a:t>
             </a:r>
           </a:p>
-        </p:txBody>
-      </p:sp>
-      <p:sp>
-        <p:nvSpPr>
-          <p:cNvPr id="15" name="TextBox 14"/>
-          <p:cNvSpPr txBox="1"/>
-          <p:nvPr/>
-        </p:nvSpPr>
-        <p:spPr>
-          <a:xfrm>
-            <a:off x="668640" y="4129020"/>
-            <a:ext cx="3305738" cy="1008780"/>
-          </a:xfrm>
-          <a:prstGeom prst="rect">
-            <a:avLst/>
-          </a:prstGeom>
-          <a:noFill/>
-        </p:spPr>
-        <p:txBody>
-          <a:bodyPr wrap="square" lIns="0" rIns="0" tIns="0" bIns="0" anchor="t">
-            <a:spAutoFit/>
-          </a:bodyPr>
-          <a:lstStyle/>
-          <a:p>
-            <a:pPr algn="l">
-              <a:lnSpc>
-                <a:spcPct val="125000"/>
-              </a:lnSpc>
+          <a:p>
+            <a:pPr algn="l">
+              <a:lnSpc>
+                <a:spcPct val="118000"/>
+              </a:lnSpc>
+              <a:spcBef>
+                <a:spcPts val="400"/>
+              </a:spcBef>
             </a:pPr>
             <a:r>
               <a:rPr sz="1500" b="0" i="0">
@@ -19458,7 +18718,7 @@
       </p:sp>
       <p:sp>
         <p:nvSpPr>
-          <p:cNvPr id="16" name="Rounded Rectangle 15"/>
+          <p:cNvPr id="8" name="Rounded Rectangle 7"/>
           <p:cNvSpPr/>
           <p:nvPr/>
         </p:nvSpPr>
@@ -19497,33 +18757,7 @@
           </a:fontRef>
         </p:style>
         <p:txBody>
-          <a:bodyPr rtlCol="0" anchor="ctr"/>
-          <a:lstStyle/>
-          <a:p>
-            <a:pPr algn="ctr"/>
-          </a:p>
-        </p:txBody>
-      </p:sp>
-      <p:sp>
-        <p:nvSpPr>
-          <p:cNvPr id="17" name="TextBox 16"/>
-          <p:cNvSpPr txBox="1"/>
-          <p:nvPr/>
-        </p:nvSpPr>
-        <p:spPr>
-          <a:xfrm>
-            <a:off x="4442978" y="3709020"/>
-            <a:ext cx="3305738" cy="450000"/>
-          </a:xfrm>
-          <a:prstGeom prst="rect">
-            <a:avLst/>
-          </a:prstGeom>
-          <a:noFill/>
-        </p:spPr>
-        <p:txBody>
-          <a:bodyPr wrap="square" lIns="0" rIns="0" tIns="0" bIns="0" anchor="t">
-            <a:spAutoFit/>
-          </a:bodyPr>
+          <a:bodyPr rtlCol="0" anchor="t" wrap="square" lIns="110000" rIns="110000" tIns="95000" bIns="95000"/>
           <a:lstStyle/>
           <a:p>
             <a:pPr algn="l">
@@ -19541,34 +18775,14 @@
               <a:t>성공 지표</a:t>
             </a:r>
           </a:p>
-        </p:txBody>
-      </p:sp>
-      <p:sp>
-        <p:nvSpPr>
-          <p:cNvPr id="18" name="TextBox 17"/>
-          <p:cNvSpPr txBox="1"/>
-          <p:nvPr/>
-        </p:nvSpPr>
-        <p:spPr>
-          <a:xfrm>
-            <a:off x="4442978" y="4129020"/>
-            <a:ext cx="3305738" cy="1008780"/>
-          </a:xfrm>
-          <a:prstGeom prst="rect">
-            <a:avLst/>
-          </a:prstGeom>
-          <a:noFill/>
-        </p:spPr>
-        <p:txBody>
-          <a:bodyPr wrap="square" lIns="0" rIns="0" tIns="0" bIns="0" anchor="t">
-            <a:spAutoFit/>
-          </a:bodyPr>
-          <a:lstStyle/>
-          <a:p>
-            <a:pPr algn="l">
-              <a:lnSpc>
-                <a:spcPct val="125000"/>
-              </a:lnSpc>
+          <a:p>
+            <a:pPr algn="l">
+              <a:lnSpc>
+                <a:spcPct val="118000"/>
+              </a:lnSpc>
+              <a:spcBef>
+                <a:spcPts val="400"/>
+              </a:spcBef>
             </a:pPr>
             <a:r>
               <a:rPr sz="1500" b="0" i="0">
@@ -19584,7 +18798,7 @@
       </p:sp>
       <p:sp>
         <p:nvSpPr>
-          <p:cNvPr id="19" name="Rounded Rectangle 18"/>
+          <p:cNvPr id="9" name="Rounded Rectangle 8"/>
           <p:cNvSpPr/>
           <p:nvPr/>
         </p:nvSpPr>
@@ -19623,23 +18837,55 @@
           </a:fontRef>
         </p:style>
         <p:txBody>
-          <a:bodyPr rtlCol="0" anchor="ctr"/>
-          <a:lstStyle/>
-          <a:p>
-            <a:pPr algn="ctr"/>
-          </a:p>
-        </p:txBody>
-      </p:sp>
-      <p:sp>
-        <p:nvSpPr>
-          <p:cNvPr id="20" name="TextBox 19"/>
+          <a:bodyPr rtlCol="0" anchor="t" wrap="square" lIns="110000" rIns="110000" tIns="95000" bIns="95000"/>
+          <a:lstStyle/>
+          <a:p>
+            <a:pPr algn="l">
+              <a:lnSpc>
+                <a:spcPct val="115000"/>
+              </a:lnSpc>
+            </a:pPr>
+            <a:r>
+              <a:rPr sz="1700" b="1" i="0">
+                <a:solidFill>
+                  <a:srgbClr val="111111"/>
+                </a:solidFill>
+                <a:latin typeface="Apple SD Gothic Neo"/>
+              </a:rPr>
+              <a:t>리스크</a:t>
+            </a:r>
+          </a:p>
+          <a:p>
+            <a:pPr algn="l">
+              <a:lnSpc>
+                <a:spcPct val="118000"/>
+              </a:lnSpc>
+              <a:spcBef>
+                <a:spcPts val="400"/>
+              </a:spcBef>
+            </a:pPr>
+            <a:r>
+              <a:rPr sz="1500" b="0" i="0">
+                <a:solidFill>
+                  <a:srgbClr val="333333"/>
+                </a:solidFill>
+                <a:latin typeface="Apple SD Gothic Neo"/>
+              </a:rPr>
+              <a:t>오픈 질문</a:t>
+            </a:r>
+          </a:p>
+        </p:txBody>
+      </p:sp>
+      <p:sp>
+        <p:nvSpPr>
+          <p:cNvPr id="10" name="TextBox 9"/>
           <p:cNvSpPr txBox="1"/>
           <p:nvPr/>
         </p:nvSpPr>
         <p:spPr>
           <a:xfrm>
-            <a:off x="8217316" y="3709020"/>
-            <a:ext cx="3305738" cy="450000"/>
+            <a:off x="548640" y="6080760"/>
+            <a:ext cx="11094415" cy="457200"/>
           </a:xfrm>
           <a:prstGeom prst="rect">
             <a:avLst/>
@@ -19654,31 +18900,31 @@
           <a:p>
             <a:pPr algn="l">
               <a:lnSpc>
-                <a:spcPct val="115000"/>
-              </a:lnSpc>
-            </a:pPr>
-            <a:r>
-              <a:rPr sz="1700" b="1" i="0">
-                <a:solidFill>
-                  <a:srgbClr val="111111"/>
-                </a:solidFill>
-                <a:latin typeface="Apple SD Gothic Neo"/>
-              </a:rPr>
-              <a:t>리스크</a:t>
-            </a:r>
-          </a:p>
-        </p:txBody>
-      </p:sp>
-      <p:sp>
-        <p:nvSpPr>
-          <p:cNvPr id="21" name="TextBox 20"/>
+                <a:spcPct val="130000"/>
+              </a:lnSpc>
+            </a:pPr>
+            <a:r>
+              <a:rPr sz="1200" b="0" i="0">
+                <a:solidFill>
+                  <a:srgbClr val="333333"/>
+                </a:solidFill>
+                <a:latin typeface="Apple SD Gothic Neo"/>
+              </a:rPr>
+              <a:t>오늘은 1일 내 프로토타입 가능한 최소 PRD를 만든다</a:t>
+            </a:r>
+          </a:p>
+        </p:txBody>
+      </p:sp>
+      <p:sp>
+        <p:nvSpPr>
+          <p:cNvPr id="11" name="TextBox 10"/>
           <p:cNvSpPr txBox="1"/>
           <p:nvPr/>
         </p:nvSpPr>
         <p:spPr>
           <a:xfrm>
-            <a:off x="8217316" y="4129020"/>
-            <a:ext cx="3305738" cy="1008780"/>
+            <a:off x="548640" y="6492240"/>
+            <a:ext cx="5486400" cy="274320"/>
           </a:xfrm>
           <a:prstGeom prst="rect">
             <a:avLst/>
@@ -19693,94 +18939,16 @@
           <a:p>
             <a:pPr algn="l">
               <a:lnSpc>
-                <a:spcPct val="125000"/>
-              </a:lnSpc>
-            </a:pPr>
-            <a:r>
-              <a:rPr sz="1500" b="0" i="0">
+                <a:spcPct val="115000"/>
+              </a:lnSpc>
+            </a:pPr>
+            <a:r>
+              <a:rPr sz="1200" b="0" i="0">
                 <a:solidFill>
                   <a:srgbClr val="333333"/>
                 </a:solidFill>
                 <a:latin typeface="Apple SD Gothic Neo"/>
               </a:rPr>
-              <a:t>오픈 질문</a:t>
-            </a:r>
-          </a:p>
-        </p:txBody>
-      </p:sp>
-      <p:sp>
-        <p:nvSpPr>
-          <p:cNvPr id="22" name="TextBox 21"/>
-          <p:cNvSpPr txBox="1"/>
-          <p:nvPr/>
-        </p:nvSpPr>
-        <p:spPr>
-          <a:xfrm>
-            <a:off x="548640" y="6080760"/>
-            <a:ext cx="11094415" cy="457200"/>
-          </a:xfrm>
-          <a:prstGeom prst="rect">
-            <a:avLst/>
-          </a:prstGeom>
-          <a:noFill/>
-        </p:spPr>
-        <p:txBody>
-          <a:bodyPr wrap="square" lIns="0" rIns="0" tIns="0" bIns="0" anchor="t">
-            <a:spAutoFit/>
-          </a:bodyPr>
-          <a:lstStyle/>
-          <a:p>
-            <a:pPr algn="l">
-              <a:lnSpc>
-                <a:spcPct val="130000"/>
-              </a:lnSpc>
-            </a:pPr>
-            <a:r>
-              <a:rPr sz="1200" b="0" i="0">
-                <a:solidFill>
-                  <a:srgbClr val="333333"/>
-                </a:solidFill>
-                <a:latin typeface="Apple SD Gothic Neo"/>
-              </a:rPr>
-              <a:t>오늘은 1일 내 프로토타입 가능한 최소 PRD를 만든다</a:t>
-            </a:r>
-          </a:p>
-        </p:txBody>
-      </p:sp>
-      <p:sp>
-        <p:nvSpPr>
-          <p:cNvPr id="23" name="TextBox 22"/>
-          <p:cNvSpPr txBox="1"/>
-          <p:nvPr/>
-        </p:nvSpPr>
-        <p:spPr>
-          <a:xfrm>
-            <a:off x="548640" y="6492240"/>
-            <a:ext cx="5486400" cy="274320"/>
-          </a:xfrm>
-          <a:prstGeom prst="rect">
-            <a:avLst/>
-          </a:prstGeom>
-          <a:noFill/>
-        </p:spPr>
-        <p:txBody>
-          <a:bodyPr wrap="square" lIns="0" rIns="0" tIns="0" bIns="0" anchor="t">
-            <a:spAutoFit/>
-          </a:bodyPr>
-          <a:lstStyle/>
-          <a:p>
-            <a:pPr algn="l">
-              <a:lnSpc>
-                <a:spcPct val="115000"/>
-              </a:lnSpc>
-            </a:pPr>
-            <a:r>
-              <a:rPr sz="1200" b="0" i="0">
-                <a:solidFill>
-                  <a:srgbClr val="333333"/>
-                </a:solidFill>
-                <a:latin typeface="Apple SD Gothic Neo"/>
-              </a:rPr>
               <a:t>개발자에서 AI Native로 · 서울AI재단 5시간 워크숍</a:t>
             </a:r>
           </a:p>
@@ -19788,7 +18956,7 @@
       </p:sp>
       <p:sp>
         <p:nvSpPr>
-          <p:cNvPr id="24" name="TextBox 23"/>
+          <p:cNvPr id="12" name="TextBox 11"/>
           <p:cNvSpPr txBox="1"/>
           <p:nvPr/>
         </p:nvSpPr>
@@ -22311,33 +21479,7 @@
           </a:fontRef>
         </p:style>
         <p:txBody>
-          <a:bodyPr rtlCol="0" anchor="ctr"/>
-          <a:lstStyle/>
-          <a:p>
-            <a:pPr algn="ctr"/>
-          </a:p>
-        </p:txBody>
-      </p:sp>
-      <p:sp>
-        <p:nvSpPr>
-          <p:cNvPr id="5" name="TextBox 4"/>
-          <p:cNvSpPr txBox="1"/>
-          <p:nvPr/>
-        </p:nvSpPr>
-        <p:spPr>
-          <a:xfrm>
-            <a:off x="668640" y="1811640"/>
-            <a:ext cx="3305738" cy="450000"/>
-          </a:xfrm>
-          <a:prstGeom prst="rect">
-            <a:avLst/>
-          </a:prstGeom>
-          <a:noFill/>
-        </p:spPr>
-        <p:txBody>
-          <a:bodyPr wrap="square" lIns="0" rIns="0" tIns="0" bIns="0" anchor="t">
-            <a:spAutoFit/>
-          </a:bodyPr>
+          <a:bodyPr rtlCol="0" anchor="t" wrap="square" lIns="110000" rIns="110000" tIns="95000" bIns="95000"/>
           <a:lstStyle/>
           <a:p>
             <a:pPr algn="l">
@@ -22355,34 +21497,14 @@
               <a:t>Leadership</a:t>
             </a:r>
           </a:p>
-        </p:txBody>
-      </p:sp>
-      <p:sp>
-        <p:nvSpPr>
-          <p:cNvPr id="6" name="TextBox 5"/>
-          <p:cNvSpPr txBox="1"/>
-          <p:nvPr/>
-        </p:nvSpPr>
-        <p:spPr>
-          <a:xfrm>
-            <a:off x="668640" y="2231640"/>
-            <a:ext cx="3305738" cy="2906160"/>
-          </a:xfrm>
-          <a:prstGeom prst="rect">
-            <a:avLst/>
-          </a:prstGeom>
-          <a:noFill/>
-        </p:spPr>
-        <p:txBody>
-          <a:bodyPr wrap="square" lIns="0" rIns="0" tIns="0" bIns="0" anchor="t">
-            <a:spAutoFit/>
-          </a:bodyPr>
-          <a:lstStyle/>
-          <a:p>
-            <a:pPr algn="l">
-              <a:lnSpc>
-                <a:spcPct val="125000"/>
-              </a:lnSpc>
+          <a:p>
+            <a:pPr algn="l">
+              <a:lnSpc>
+                <a:spcPct val="118000"/>
+              </a:lnSpc>
+              <a:spcBef>
+                <a:spcPts val="400"/>
+              </a:spcBef>
             </a:pPr>
             <a:r>
               <a:rPr sz="1500" b="0" i="0">
@@ -22397,8 +21519,11 @@
           <a:p>
             <a:pPr algn="l">
               <a:lnSpc>
-                <a:spcPct val="125000"/>
-              </a:lnSpc>
+                <a:spcPct val="118000"/>
+              </a:lnSpc>
+              <a:spcBef>
+                <a:spcPts val="400"/>
+              </a:spcBef>
             </a:pPr>
             <a:r>
               <a:rPr sz="1500" b="0" i="0">
@@ -22414,7 +21539,7 @@
       </p:sp>
       <p:sp>
         <p:nvSpPr>
-          <p:cNvPr id="7" name="Rounded Rectangle 6"/>
+          <p:cNvPr id="5" name="Rounded Rectangle 4"/>
           <p:cNvSpPr/>
           <p:nvPr/>
         </p:nvSpPr>
@@ -22453,33 +21578,7 @@
           </a:fontRef>
         </p:style>
         <p:txBody>
-          <a:bodyPr rtlCol="0" anchor="ctr"/>
-          <a:lstStyle/>
-          <a:p>
-            <a:pPr algn="ctr"/>
-          </a:p>
-        </p:txBody>
-      </p:sp>
-      <p:sp>
-        <p:nvSpPr>
-          <p:cNvPr id="8" name="TextBox 7"/>
-          <p:cNvSpPr txBox="1"/>
-          <p:nvPr/>
-        </p:nvSpPr>
-        <p:spPr>
-          <a:xfrm>
-            <a:off x="4442978" y="1811640"/>
-            <a:ext cx="3305738" cy="450000"/>
-          </a:xfrm>
-          <a:prstGeom prst="rect">
-            <a:avLst/>
-          </a:prstGeom>
-          <a:noFill/>
-        </p:spPr>
-        <p:txBody>
-          <a:bodyPr wrap="square" lIns="0" rIns="0" tIns="0" bIns="0" anchor="t">
-            <a:spAutoFit/>
-          </a:bodyPr>
+          <a:bodyPr rtlCol="0" anchor="t" wrap="square" lIns="110000" rIns="110000" tIns="95000" bIns="95000"/>
           <a:lstStyle/>
           <a:p>
             <a:pPr algn="l">
@@ -22497,34 +21596,14 @@
               <a:t>UI/UX Designer</a:t>
             </a:r>
           </a:p>
-        </p:txBody>
-      </p:sp>
-      <p:sp>
-        <p:nvSpPr>
-          <p:cNvPr id="9" name="TextBox 8"/>
-          <p:cNvSpPr txBox="1"/>
-          <p:nvPr/>
-        </p:nvSpPr>
-        <p:spPr>
-          <a:xfrm>
-            <a:off x="4442978" y="2231640"/>
-            <a:ext cx="3305738" cy="2906160"/>
-          </a:xfrm>
-          <a:prstGeom prst="rect">
-            <a:avLst/>
-          </a:prstGeom>
-          <a:noFill/>
-        </p:spPr>
-        <p:txBody>
-          <a:bodyPr wrap="square" lIns="0" rIns="0" tIns="0" bIns="0" anchor="t">
-            <a:spAutoFit/>
-          </a:bodyPr>
-          <a:lstStyle/>
-          <a:p>
-            <a:pPr algn="l">
-              <a:lnSpc>
-                <a:spcPct val="125000"/>
-              </a:lnSpc>
+          <a:p>
+            <a:pPr algn="l">
+              <a:lnSpc>
+                <a:spcPct val="118000"/>
+              </a:lnSpc>
+              <a:spcBef>
+                <a:spcPts val="400"/>
+              </a:spcBef>
             </a:pPr>
             <a:r>
               <a:rPr sz="1500" b="0" i="0">
@@ -22539,8 +21618,11 @@
           <a:p>
             <a:pPr algn="l">
               <a:lnSpc>
-                <a:spcPct val="125000"/>
-              </a:lnSpc>
+                <a:spcPct val="118000"/>
+              </a:lnSpc>
+              <a:spcBef>
+                <a:spcPts val="400"/>
+              </a:spcBef>
             </a:pPr>
             <a:r>
               <a:rPr sz="1500" b="0" i="0">
@@ -22556,7 +21638,7 @@
       </p:sp>
       <p:sp>
         <p:nvSpPr>
-          <p:cNvPr id="10" name="Rounded Rectangle 9"/>
+          <p:cNvPr id="6" name="Rounded Rectangle 5"/>
           <p:cNvSpPr/>
           <p:nvPr/>
         </p:nvSpPr>
@@ -22595,23 +21677,74 @@
           </a:fontRef>
         </p:style>
         <p:txBody>
-          <a:bodyPr rtlCol="0" anchor="ctr"/>
-          <a:lstStyle/>
-          <a:p>
-            <a:pPr algn="ctr"/>
-          </a:p>
-        </p:txBody>
-      </p:sp>
-      <p:sp>
-        <p:nvSpPr>
-          <p:cNvPr id="11" name="TextBox 10"/>
+          <a:bodyPr rtlCol="0" anchor="t" wrap="square" lIns="110000" rIns="110000" tIns="95000" bIns="95000"/>
+          <a:lstStyle/>
+          <a:p>
+            <a:pPr algn="l">
+              <a:lnSpc>
+                <a:spcPct val="115000"/>
+              </a:lnSpc>
+            </a:pPr>
+            <a:r>
+              <a:rPr sz="1700" b="1" i="0">
+                <a:solidFill>
+                  <a:srgbClr val="111111"/>
+                </a:solidFill>
+                <a:latin typeface="Apple SD Gothic Neo"/>
+              </a:rPr>
+              <a:t>Engineer</a:t>
+            </a:r>
+          </a:p>
+          <a:p>
+            <a:pPr algn="l">
+              <a:lnSpc>
+                <a:spcPct val="118000"/>
+              </a:lnSpc>
+              <a:spcBef>
+                <a:spcPts val="400"/>
+              </a:spcBef>
+            </a:pPr>
+            <a:r>
+              <a:rPr sz="1500" b="0" i="0">
+                <a:solidFill>
+                  <a:srgbClr val="333333"/>
+                </a:solidFill>
+                <a:latin typeface="Apple SD Gothic Neo"/>
+              </a:rPr>
+              <a:t>구현 가능한가</a:t>
+            </a:r>
+          </a:p>
+          <a:p>
+            <a:pPr algn="l">
+              <a:lnSpc>
+                <a:spcPct val="118000"/>
+              </a:lnSpc>
+              <a:spcBef>
+                <a:spcPts val="400"/>
+              </a:spcBef>
+            </a:pPr>
+            <a:r>
+              <a:rPr sz="1500" b="0" i="0">
+                <a:solidFill>
+                  <a:srgbClr val="333333"/>
+                </a:solidFill>
+                <a:latin typeface="Apple SD Gothic Neo"/>
+              </a:rPr>
+              <a:t>Technical Feasibility</a:t>
+            </a:r>
+          </a:p>
+        </p:txBody>
+      </p:sp>
+      <p:sp>
+        <p:nvSpPr>
+          <p:cNvPr id="7" name="TextBox 6"/>
           <p:cNvSpPr txBox="1"/>
           <p:nvPr/>
         </p:nvSpPr>
         <p:spPr>
           <a:xfrm>
-            <a:off x="8217316" y="1811640"/>
-            <a:ext cx="3305738" cy="450000"/>
+            <a:off x="548640" y="6080760"/>
+            <a:ext cx="11094415" cy="457200"/>
           </a:xfrm>
           <a:prstGeom prst="rect">
             <a:avLst/>
@@ -22626,31 +21759,31 @@
           <a:p>
             <a:pPr algn="l">
               <a:lnSpc>
-                <a:spcPct val="115000"/>
-              </a:lnSpc>
-            </a:pPr>
-            <a:r>
-              <a:rPr sz="1700" b="1" i="0">
-                <a:solidFill>
-                  <a:srgbClr val="111111"/>
-                </a:solidFill>
-                <a:latin typeface="Apple SD Gothic Neo"/>
-              </a:rPr>
-              <a:t>Engineer</a:t>
-            </a:r>
-          </a:p>
-        </p:txBody>
-      </p:sp>
-      <p:sp>
-        <p:nvSpPr>
-          <p:cNvPr id="12" name="TextBox 11"/>
+                <a:spcPct val="130000"/>
+              </a:lnSpc>
+            </a:pPr>
+            <a:r>
+              <a:rPr sz="1200" b="0" i="0">
+                <a:solidFill>
+                  <a:srgbClr val="333333"/>
+                </a:solidFill>
+                <a:latin typeface="Apple SD Gothic Neo"/>
+              </a:rPr>
+              <a:t>참고 — docs/12-prd-review-perspectives.md</a:t>
+            </a:r>
+          </a:p>
+        </p:txBody>
+      </p:sp>
+      <p:sp>
+        <p:nvSpPr>
+          <p:cNvPr id="8" name="TextBox 7"/>
           <p:cNvSpPr txBox="1"/>
           <p:nvPr/>
         </p:nvSpPr>
         <p:spPr>
           <a:xfrm>
-            <a:off x="8217316" y="2231640"/>
-            <a:ext cx="3305738" cy="2906160"/>
+            <a:off x="548640" y="6492240"/>
+            <a:ext cx="5486400" cy="274320"/>
           </a:xfrm>
           <a:prstGeom prst="rect">
             <a:avLst/>
@@ -22665,110 +21798,16 @@
           <a:p>
             <a:pPr algn="l">
               <a:lnSpc>
-                <a:spcPct val="125000"/>
-              </a:lnSpc>
-            </a:pPr>
-            <a:r>
-              <a:rPr sz="1500" b="0" i="0">
+                <a:spcPct val="115000"/>
+              </a:lnSpc>
+            </a:pPr>
+            <a:r>
+              <a:rPr sz="1200" b="0" i="0">
                 <a:solidFill>
                   <a:srgbClr val="333333"/>
                 </a:solidFill>
                 <a:latin typeface="Apple SD Gothic Neo"/>
               </a:rPr>
-              <a:t>구현 가능한가</a:t>
-            </a:r>
-          </a:p>
-          <a:p>
-            <a:pPr algn="l">
-              <a:lnSpc>
-                <a:spcPct val="125000"/>
-              </a:lnSpc>
-            </a:pPr>
-            <a:r>
-              <a:rPr sz="1500" b="0" i="0">
-                <a:solidFill>
-                  <a:srgbClr val="333333"/>
-                </a:solidFill>
-                <a:latin typeface="Apple SD Gothic Neo"/>
-              </a:rPr>
-              <a:t>Technical Feasibility</a:t>
-            </a:r>
-          </a:p>
-        </p:txBody>
-      </p:sp>
-      <p:sp>
-        <p:nvSpPr>
-          <p:cNvPr id="13" name="TextBox 12"/>
-          <p:cNvSpPr txBox="1"/>
-          <p:nvPr/>
-        </p:nvSpPr>
-        <p:spPr>
-          <a:xfrm>
-            <a:off x="548640" y="6080760"/>
-            <a:ext cx="11094415" cy="457200"/>
-          </a:xfrm>
-          <a:prstGeom prst="rect">
-            <a:avLst/>
-          </a:prstGeom>
-          <a:noFill/>
-        </p:spPr>
-        <p:txBody>
-          <a:bodyPr wrap="square" lIns="0" rIns="0" tIns="0" bIns="0" anchor="t">
-            <a:spAutoFit/>
-          </a:bodyPr>
-          <a:lstStyle/>
-          <a:p>
-            <a:pPr algn="l">
-              <a:lnSpc>
-                <a:spcPct val="130000"/>
-              </a:lnSpc>
-            </a:pPr>
-            <a:r>
-              <a:rPr sz="1200" b="0" i="0">
-                <a:solidFill>
-                  <a:srgbClr val="333333"/>
-                </a:solidFill>
-                <a:latin typeface="Apple SD Gothic Neo"/>
-              </a:rPr>
-              <a:t>참고 — docs/12-prd-review-perspectives.md</a:t>
-            </a:r>
-          </a:p>
-        </p:txBody>
-      </p:sp>
-      <p:sp>
-        <p:nvSpPr>
-          <p:cNvPr id="14" name="TextBox 13"/>
-          <p:cNvSpPr txBox="1"/>
-          <p:nvPr/>
-        </p:nvSpPr>
-        <p:spPr>
-          <a:xfrm>
-            <a:off x="548640" y="6492240"/>
-            <a:ext cx="5486400" cy="274320"/>
-          </a:xfrm>
-          <a:prstGeom prst="rect">
-            <a:avLst/>
-          </a:prstGeom>
-          <a:noFill/>
-        </p:spPr>
-        <p:txBody>
-          <a:bodyPr wrap="square" lIns="0" rIns="0" tIns="0" bIns="0" anchor="t">
-            <a:spAutoFit/>
-          </a:bodyPr>
-          <a:lstStyle/>
-          <a:p>
-            <a:pPr algn="l">
-              <a:lnSpc>
-                <a:spcPct val="115000"/>
-              </a:lnSpc>
-            </a:pPr>
-            <a:r>
-              <a:rPr sz="1200" b="0" i="0">
-                <a:solidFill>
-                  <a:srgbClr val="333333"/>
-                </a:solidFill>
-                <a:latin typeface="Apple SD Gothic Neo"/>
-              </a:rPr>
               <a:t>개발자에서 AI Native로 · 서울AI재단 5시간 워크숍</a:t>
             </a:r>
           </a:p>
@@ -22776,7 +21815,7 @@
       </p:sp>
       <p:sp>
         <p:nvSpPr>
-          <p:cNvPr id="15" name="TextBox 14"/>
+          <p:cNvPr id="9" name="TextBox 8"/>
           <p:cNvSpPr txBox="1"/>
           <p:nvPr/>
         </p:nvSpPr>
@@ -22954,33 +21993,7 @@
           </a:fontRef>
         </p:style>
         <p:txBody>
-          <a:bodyPr rtlCol="0" anchor="ctr"/>
-          <a:lstStyle/>
-          <a:p>
-            <a:pPr algn="ctr"/>
-          </a:p>
-        </p:txBody>
-      </p:sp>
-      <p:sp>
-        <p:nvSpPr>
-          <p:cNvPr id="5" name="TextBox 4"/>
-          <p:cNvSpPr txBox="1"/>
-          <p:nvPr/>
-        </p:nvSpPr>
-        <p:spPr>
-          <a:xfrm>
-            <a:off x="668640" y="1811640"/>
-            <a:ext cx="5192907" cy="450000"/>
-          </a:xfrm>
-          <a:prstGeom prst="rect">
-            <a:avLst/>
-          </a:prstGeom>
-          <a:noFill/>
-        </p:spPr>
-        <p:txBody>
-          <a:bodyPr wrap="square" lIns="0" rIns="0" tIns="0" bIns="0" anchor="t">
-            <a:spAutoFit/>
-          </a:bodyPr>
+          <a:bodyPr rtlCol="0" anchor="t" wrap="square" lIns="110000" rIns="110000" tIns="95000" bIns="95000"/>
           <a:lstStyle/>
           <a:p>
             <a:pPr algn="l">
@@ -22998,34 +22011,14 @@
               <a:t>AI에게 일을 맡긴다는 것</a:t>
             </a:r>
           </a:p>
-        </p:txBody>
-      </p:sp>
-      <p:sp>
-        <p:nvSpPr>
-          <p:cNvPr id="6" name="TextBox 5"/>
-          <p:cNvSpPr txBox="1"/>
-          <p:nvPr/>
-        </p:nvSpPr>
-        <p:spPr>
-          <a:xfrm>
-            <a:off x="668640" y="2231640"/>
-            <a:ext cx="5192907" cy="1328820"/>
-          </a:xfrm>
-          <a:prstGeom prst="rect">
-            <a:avLst/>
-          </a:prstGeom>
-          <a:noFill/>
-        </p:spPr>
-        <p:txBody>
-          <a:bodyPr wrap="square" lIns="0" rIns="0" tIns="0" bIns="0" anchor="t">
-            <a:spAutoFit/>
-          </a:bodyPr>
-          <a:lstStyle/>
-          <a:p>
-            <a:pPr algn="l">
-              <a:lnSpc>
-                <a:spcPct val="125000"/>
-              </a:lnSpc>
+          <a:p>
+            <a:pPr algn="l">
+              <a:lnSpc>
+                <a:spcPct val="118000"/>
+              </a:lnSpc>
+              <a:spcBef>
+                <a:spcPts val="400"/>
+              </a:spcBef>
             </a:pPr>
             <a:r>
               <a:rPr sz="1500" b="0" i="0">
@@ -23041,7 +22034,7 @@
       </p:sp>
       <p:sp>
         <p:nvSpPr>
-          <p:cNvPr id="7" name="Rounded Rectangle 6"/>
+          <p:cNvPr id="5" name="Rounded Rectangle 4"/>
           <p:cNvSpPr/>
           <p:nvPr/>
         </p:nvSpPr>
@@ -23080,33 +22073,7 @@
           </a:fontRef>
         </p:style>
         <p:txBody>
-          <a:bodyPr rtlCol="0" anchor="ctr"/>
-          <a:lstStyle/>
-          <a:p>
-            <a:pPr algn="ctr"/>
-          </a:p>
-        </p:txBody>
-      </p:sp>
-      <p:sp>
-        <p:nvSpPr>
-          <p:cNvPr id="8" name="TextBox 7"/>
-          <p:cNvSpPr txBox="1"/>
-          <p:nvPr/>
-        </p:nvSpPr>
-        <p:spPr>
-          <a:xfrm>
-            <a:off x="6330147" y="1811640"/>
-            <a:ext cx="5192907" cy="450000"/>
-          </a:xfrm>
-          <a:prstGeom prst="rect">
-            <a:avLst/>
-          </a:prstGeom>
-          <a:noFill/>
-        </p:spPr>
-        <p:txBody>
-          <a:bodyPr wrap="square" lIns="0" rIns="0" tIns="0" bIns="0" anchor="t">
-            <a:spAutoFit/>
-          </a:bodyPr>
+          <a:bodyPr rtlCol="0" anchor="t" wrap="square" lIns="110000" rIns="110000" tIns="95000" bIns="95000"/>
           <a:lstStyle/>
           <a:p>
             <a:pPr algn="l">
@@ -23124,34 +22091,14 @@
               <a:t>문서와 코드의 연결</a:t>
             </a:r>
           </a:p>
-        </p:txBody>
-      </p:sp>
-      <p:sp>
-        <p:nvSpPr>
-          <p:cNvPr id="9" name="TextBox 8"/>
-          <p:cNvSpPr txBox="1"/>
-          <p:nvPr/>
-        </p:nvSpPr>
-        <p:spPr>
-          <a:xfrm>
-            <a:off x="6330147" y="2231640"/>
-            <a:ext cx="5192907" cy="1328820"/>
-          </a:xfrm>
-          <a:prstGeom prst="rect">
-            <a:avLst/>
-          </a:prstGeom>
-          <a:noFill/>
-        </p:spPr>
-        <p:txBody>
-          <a:bodyPr wrap="square" lIns="0" rIns="0" tIns="0" bIns="0" anchor="t">
-            <a:spAutoFit/>
-          </a:bodyPr>
-          <a:lstStyle/>
-          <a:p>
-            <a:pPr algn="l">
-              <a:lnSpc>
-                <a:spcPct val="125000"/>
-              </a:lnSpc>
+          <a:p>
+            <a:pPr algn="l">
+              <a:lnSpc>
+                <a:spcPct val="118000"/>
+              </a:lnSpc>
+              <a:spcBef>
+                <a:spcPts val="400"/>
+              </a:spcBef>
             </a:pPr>
             <a:r>
               <a:rPr sz="1500" b="0" i="0">
@@ -23167,7 +22114,7 @@
       </p:sp>
       <p:sp>
         <p:nvSpPr>
-          <p:cNvPr id="10" name="Rounded Rectangle 9"/>
+          <p:cNvPr id="6" name="Rounded Rectangle 5"/>
           <p:cNvSpPr/>
           <p:nvPr/>
         </p:nvSpPr>
@@ -23206,33 +22153,7 @@
           </a:fontRef>
         </p:style>
         <p:txBody>
-          <a:bodyPr rtlCol="0" anchor="ctr"/>
-          <a:lstStyle/>
-          <a:p>
-            <a:pPr algn="ctr"/>
-          </a:p>
-        </p:txBody>
-      </p:sp>
-      <p:sp>
-        <p:nvSpPr>
-          <p:cNvPr id="11" name="TextBox 10"/>
-          <p:cNvSpPr txBox="1"/>
-          <p:nvPr/>
-        </p:nvSpPr>
-        <p:spPr>
-          <a:xfrm>
-            <a:off x="668640" y="4029060"/>
-            <a:ext cx="5192907" cy="450000"/>
-          </a:xfrm>
-          <a:prstGeom prst="rect">
-            <a:avLst/>
-          </a:prstGeom>
-          <a:noFill/>
-        </p:spPr>
-        <p:txBody>
-          <a:bodyPr wrap="square" lIns="0" rIns="0" tIns="0" bIns="0" anchor="t">
-            <a:spAutoFit/>
-          </a:bodyPr>
+          <a:bodyPr rtlCol="0" anchor="t" wrap="square" lIns="110000" rIns="110000" tIns="95000" bIns="95000"/>
           <a:lstStyle/>
           <a:p>
             <a:pPr algn="l">
@@ -23250,34 +22171,14 @@
               <a:t>Claude Desktop의 역할</a:t>
             </a:r>
           </a:p>
-        </p:txBody>
-      </p:sp>
-      <p:sp>
-        <p:nvSpPr>
-          <p:cNvPr id="12" name="TextBox 11"/>
-          <p:cNvSpPr txBox="1"/>
-          <p:nvPr/>
-        </p:nvSpPr>
-        <p:spPr>
-          <a:xfrm>
-            <a:off x="668640" y="4449060"/>
-            <a:ext cx="5192907" cy="1328820"/>
-          </a:xfrm>
-          <a:prstGeom prst="rect">
-            <a:avLst/>
-          </a:prstGeom>
-          <a:noFill/>
-        </p:spPr>
-        <p:txBody>
-          <a:bodyPr wrap="square" lIns="0" rIns="0" tIns="0" bIns="0" anchor="t">
-            <a:spAutoFit/>
-          </a:bodyPr>
-          <a:lstStyle/>
-          <a:p>
-            <a:pPr algn="l">
-              <a:lnSpc>
-                <a:spcPct val="125000"/>
-              </a:lnSpc>
+          <a:p>
+            <a:pPr algn="l">
+              <a:lnSpc>
+                <a:spcPct val="118000"/>
+              </a:lnSpc>
+              <a:spcBef>
+                <a:spcPts val="400"/>
+              </a:spcBef>
             </a:pPr>
             <a:r>
               <a:rPr sz="1500" b="0" i="0">
@@ -23293,7 +22194,7 @@
       </p:sp>
       <p:sp>
         <p:nvSpPr>
-          <p:cNvPr id="13" name="Rounded Rectangle 12"/>
+          <p:cNvPr id="7" name="Rounded Rectangle 6"/>
           <p:cNvSpPr/>
           <p:nvPr/>
         </p:nvSpPr>
@@ -23332,23 +22233,55 @@
           </a:fontRef>
         </p:style>
         <p:txBody>
-          <a:bodyPr rtlCol="0" anchor="ctr"/>
-          <a:lstStyle/>
-          <a:p>
-            <a:pPr algn="ctr"/>
-          </a:p>
-        </p:txBody>
-      </p:sp>
-      <p:sp>
-        <p:nvSpPr>
-          <p:cNvPr id="14" name="TextBox 13"/>
+          <a:bodyPr rtlCol="0" anchor="t" wrap="square" lIns="110000" rIns="110000" tIns="95000" bIns="95000"/>
+          <a:lstStyle/>
+          <a:p>
+            <a:pPr algn="l">
+              <a:lnSpc>
+                <a:spcPct val="115000"/>
+              </a:lnSpc>
+            </a:pPr>
+            <a:r>
+              <a:rPr sz="1700" b="1" i="0">
+                <a:solidFill>
+                  <a:srgbClr val="123C7C"/>
+                </a:solidFill>
+                <a:latin typeface="Apple SD Gothic Neo"/>
+              </a:rPr>
+              <a:t>사람의 판단 영역</a:t>
+            </a:r>
+          </a:p>
+          <a:p>
+            <a:pPr algn="l">
+              <a:lnSpc>
+                <a:spcPct val="118000"/>
+              </a:lnSpc>
+              <a:spcBef>
+                <a:spcPts val="400"/>
+              </a:spcBef>
+            </a:pPr>
+            <a:r>
+              <a:rPr sz="1500" b="0" i="0">
+                <a:solidFill>
+                  <a:srgbClr val="333333"/>
+                </a:solidFill>
+                <a:latin typeface="Apple SD Gothic Neo"/>
+              </a:rPr>
+              <a:t>사람은 어디서 검토해야 하나</a:t>
+            </a:r>
+          </a:p>
+        </p:txBody>
+      </p:sp>
+      <p:sp>
+        <p:nvSpPr>
+          <p:cNvPr id="8" name="TextBox 7"/>
           <p:cNvSpPr txBox="1"/>
           <p:nvPr/>
         </p:nvSpPr>
         <p:spPr>
           <a:xfrm>
-            <a:off x="6330147" y="4029060"/>
-            <a:ext cx="5192907" cy="450000"/>
+            <a:off x="548640" y="6492240"/>
+            <a:ext cx="5486400" cy="274320"/>
           </a:xfrm>
           <a:prstGeom prst="rect">
             <a:avLst/>
@@ -23367,90 +22300,12 @@
               </a:lnSpc>
             </a:pPr>
             <a:r>
-              <a:rPr sz="1700" b="1" i="0">
-                <a:solidFill>
-                  <a:srgbClr val="123C7C"/>
-                </a:solidFill>
-                <a:latin typeface="Apple SD Gothic Neo"/>
-              </a:rPr>
-              <a:t>사람의 판단 영역</a:t>
-            </a:r>
-          </a:p>
-        </p:txBody>
-      </p:sp>
-      <p:sp>
-        <p:nvSpPr>
-          <p:cNvPr id="15" name="TextBox 14"/>
-          <p:cNvSpPr txBox="1"/>
-          <p:nvPr/>
-        </p:nvSpPr>
-        <p:spPr>
-          <a:xfrm>
-            <a:off x="6330147" y="4449060"/>
-            <a:ext cx="5192907" cy="1328820"/>
-          </a:xfrm>
-          <a:prstGeom prst="rect">
-            <a:avLst/>
-          </a:prstGeom>
-          <a:noFill/>
-        </p:spPr>
-        <p:txBody>
-          <a:bodyPr wrap="square" lIns="0" rIns="0" tIns="0" bIns="0" anchor="t">
-            <a:spAutoFit/>
-          </a:bodyPr>
-          <a:lstStyle/>
-          <a:p>
-            <a:pPr algn="l">
-              <a:lnSpc>
-                <a:spcPct val="125000"/>
-              </a:lnSpc>
-            </a:pPr>
-            <a:r>
-              <a:rPr sz="1500" b="0" i="0">
+              <a:rPr sz="1200" b="0" i="0">
                 <a:solidFill>
                   <a:srgbClr val="333333"/>
                 </a:solidFill>
                 <a:latin typeface="Apple SD Gothic Neo"/>
               </a:rPr>
-              <a:t>사람은 어디서 검토해야 하나</a:t>
-            </a:r>
-          </a:p>
-        </p:txBody>
-      </p:sp>
-      <p:sp>
-        <p:nvSpPr>
-          <p:cNvPr id="16" name="TextBox 15"/>
-          <p:cNvSpPr txBox="1"/>
-          <p:nvPr/>
-        </p:nvSpPr>
-        <p:spPr>
-          <a:xfrm>
-            <a:off x="548640" y="6492240"/>
-            <a:ext cx="5486400" cy="274320"/>
-          </a:xfrm>
-          <a:prstGeom prst="rect">
-            <a:avLst/>
-          </a:prstGeom>
-          <a:noFill/>
-        </p:spPr>
-        <p:txBody>
-          <a:bodyPr wrap="square" lIns="0" rIns="0" tIns="0" bIns="0" anchor="t">
-            <a:spAutoFit/>
-          </a:bodyPr>
-          <a:lstStyle/>
-          <a:p>
-            <a:pPr algn="l">
-              <a:lnSpc>
-                <a:spcPct val="115000"/>
-              </a:lnSpc>
-            </a:pPr>
-            <a:r>
-              <a:rPr sz="1200" b="0" i="0">
-                <a:solidFill>
-                  <a:srgbClr val="333333"/>
-                </a:solidFill>
-                <a:latin typeface="Apple SD Gothic Neo"/>
-              </a:rPr>
               <a:t>개발자에서 AI Native로 · 서울AI재단 5시간 워크숍</a:t>
             </a:r>
           </a:p>
@@ -23458,7 +22313,7 @@
       </p:sp>
       <p:sp>
         <p:nvSpPr>
-          <p:cNvPr id="17" name="TextBox 16"/>
+          <p:cNvPr id="9" name="TextBox 8"/>
           <p:cNvSpPr txBox="1"/>
           <p:nvPr/>
         </p:nvSpPr>
@@ -24085,33 +22940,7 @@
           </a:fontRef>
         </p:style>
         <p:txBody>
-          <a:bodyPr rtlCol="0" anchor="ctr"/>
-          <a:lstStyle/>
-          <a:p>
-            <a:pPr algn="ctr"/>
-          </a:p>
-        </p:txBody>
-      </p:sp>
-      <p:sp>
-        <p:nvSpPr>
-          <p:cNvPr id="5" name="TextBox 4"/>
-          <p:cNvSpPr txBox="1"/>
-          <p:nvPr/>
-        </p:nvSpPr>
-        <p:spPr>
-          <a:xfrm>
-            <a:off x="668640" y="1811640"/>
-            <a:ext cx="3305738" cy="450000"/>
-          </a:xfrm>
-          <a:prstGeom prst="rect">
-            <a:avLst/>
-          </a:prstGeom>
-          <a:noFill/>
-        </p:spPr>
-        <p:txBody>
-          <a:bodyPr wrap="square" lIns="0" rIns="0" tIns="0" bIns="0" anchor="t">
-            <a:spAutoFit/>
-          </a:bodyPr>
+          <a:bodyPr rtlCol="0" anchor="t" wrap="square" lIns="110000" rIns="110000" tIns="95000" bIns="95000"/>
           <a:lstStyle/>
           <a:p>
             <a:pPr algn="l">
@@ -24129,34 +22958,14 @@
               <a:t>Flowchart</a:t>
             </a:r>
           </a:p>
-        </p:txBody>
-      </p:sp>
-      <p:sp>
-        <p:nvSpPr>
-          <p:cNvPr id="6" name="TextBox 5"/>
-          <p:cNvSpPr txBox="1"/>
-          <p:nvPr/>
-        </p:nvSpPr>
-        <p:spPr>
-          <a:xfrm>
-            <a:off x="668640" y="2231640"/>
-            <a:ext cx="3305738" cy="2906160"/>
-          </a:xfrm>
-          <a:prstGeom prst="rect">
-            <a:avLst/>
-          </a:prstGeom>
-          <a:noFill/>
-        </p:spPr>
-        <p:txBody>
-          <a:bodyPr wrap="square" lIns="0" rIns="0" tIns="0" bIns="0" anchor="t">
-            <a:spAutoFit/>
-          </a:bodyPr>
-          <a:lstStyle/>
-          <a:p>
-            <a:pPr algn="l">
-              <a:lnSpc>
-                <a:spcPct val="125000"/>
-              </a:lnSpc>
+          <a:p>
+            <a:pPr algn="l">
+              <a:lnSpc>
+                <a:spcPct val="118000"/>
+              </a:lnSpc>
+              <a:spcBef>
+                <a:spcPts val="400"/>
+              </a:spcBef>
             </a:pPr>
             <a:r>
               <a:rPr sz="1500" b="0" i="0">
@@ -24171,8 +22980,11 @@
           <a:p>
             <a:pPr algn="l">
               <a:lnSpc>
-                <a:spcPct val="125000"/>
-              </a:lnSpc>
+                <a:spcPct val="118000"/>
+              </a:lnSpc>
+              <a:spcBef>
+                <a:spcPts val="400"/>
+              </a:spcBef>
             </a:pPr>
             <a:r>
               <a:rPr sz="1500" b="0" i="0">
@@ -24188,7 +23000,7 @@
       </p:sp>
       <p:sp>
         <p:nvSpPr>
-          <p:cNvPr id="7" name="Rounded Rectangle 6"/>
+          <p:cNvPr id="5" name="Rounded Rectangle 4"/>
           <p:cNvSpPr/>
           <p:nvPr/>
         </p:nvSpPr>
@@ -24227,33 +23039,7 @@
           </a:fontRef>
         </p:style>
         <p:txBody>
-          <a:bodyPr rtlCol="0" anchor="ctr"/>
-          <a:lstStyle/>
-          <a:p>
-            <a:pPr algn="ctr"/>
-          </a:p>
-        </p:txBody>
-      </p:sp>
-      <p:sp>
-        <p:nvSpPr>
-          <p:cNvPr id="8" name="TextBox 7"/>
-          <p:cNvSpPr txBox="1"/>
-          <p:nvPr/>
-        </p:nvSpPr>
-        <p:spPr>
-          <a:xfrm>
-            <a:off x="4442978" y="1811640"/>
-            <a:ext cx="3305738" cy="450000"/>
-          </a:xfrm>
-          <a:prstGeom prst="rect">
-            <a:avLst/>
-          </a:prstGeom>
-          <a:noFill/>
-        </p:spPr>
-        <p:txBody>
-          <a:bodyPr wrap="square" lIns="0" rIns="0" tIns="0" bIns="0" anchor="t">
-            <a:spAutoFit/>
-          </a:bodyPr>
+          <a:bodyPr rtlCol="0" anchor="t" wrap="square" lIns="110000" rIns="110000" tIns="95000" bIns="95000"/>
           <a:lstStyle/>
           <a:p>
             <a:pPr algn="l">
@@ -24271,34 +23057,14 @@
               <a:t>Sequence Diagram</a:t>
             </a:r>
           </a:p>
-        </p:txBody>
-      </p:sp>
-      <p:sp>
-        <p:nvSpPr>
-          <p:cNvPr id="9" name="TextBox 8"/>
-          <p:cNvSpPr txBox="1"/>
-          <p:nvPr/>
-        </p:nvSpPr>
-        <p:spPr>
-          <a:xfrm>
-            <a:off x="4442978" y="2231640"/>
-            <a:ext cx="3305738" cy="2906160"/>
-          </a:xfrm>
-          <a:prstGeom prst="rect">
-            <a:avLst/>
-          </a:prstGeom>
-          <a:noFill/>
-        </p:spPr>
-        <p:txBody>
-          <a:bodyPr wrap="square" lIns="0" rIns="0" tIns="0" bIns="0" anchor="t">
-            <a:spAutoFit/>
-          </a:bodyPr>
-          <a:lstStyle/>
-          <a:p>
-            <a:pPr algn="l">
-              <a:lnSpc>
-                <a:spcPct val="125000"/>
-              </a:lnSpc>
+          <a:p>
+            <a:pPr algn="l">
+              <a:lnSpc>
+                <a:spcPct val="118000"/>
+              </a:lnSpc>
+              <a:spcBef>
+                <a:spcPts val="400"/>
+              </a:spcBef>
             </a:pPr>
             <a:r>
               <a:rPr sz="1500" b="0" i="0">
@@ -24313,8 +23079,11 @@
           <a:p>
             <a:pPr algn="l">
               <a:lnSpc>
-                <a:spcPct val="125000"/>
-              </a:lnSpc>
+                <a:spcPct val="118000"/>
+              </a:lnSpc>
+              <a:spcBef>
+                <a:spcPts val="400"/>
+              </a:spcBef>
             </a:pPr>
             <a:r>
               <a:rPr sz="1500" b="0" i="0">
@@ -24330,7 +23099,7 @@
       </p:sp>
       <p:sp>
         <p:nvSpPr>
-          <p:cNvPr id="10" name="Rounded Rectangle 9"/>
+          <p:cNvPr id="6" name="Rounded Rectangle 5"/>
           <p:cNvSpPr/>
           <p:nvPr/>
         </p:nvSpPr>
@@ -24369,23 +23138,74 @@
           </a:fontRef>
         </p:style>
         <p:txBody>
-          <a:bodyPr rtlCol="0" anchor="ctr"/>
-          <a:lstStyle/>
-          <a:p>
-            <a:pPr algn="ctr"/>
-          </a:p>
-        </p:txBody>
-      </p:sp>
-      <p:sp>
-        <p:nvSpPr>
-          <p:cNvPr id="11" name="TextBox 10"/>
+          <a:bodyPr rtlCol="0" anchor="t" wrap="square" lIns="110000" rIns="110000" tIns="95000" bIns="95000"/>
+          <a:lstStyle/>
+          <a:p>
+            <a:pPr algn="l">
+              <a:lnSpc>
+                <a:spcPct val="115000"/>
+              </a:lnSpc>
+            </a:pPr>
+            <a:r>
+              <a:rPr sz="1700" b="1" i="0">
+                <a:solidFill>
+                  <a:srgbClr val="111111"/>
+                </a:solidFill>
+                <a:latin typeface="Apple SD Gothic Neo"/>
+              </a:rPr>
+              <a:t>ERD</a:t>
+            </a:r>
+          </a:p>
+          <a:p>
+            <a:pPr algn="l">
+              <a:lnSpc>
+                <a:spcPct val="118000"/>
+              </a:lnSpc>
+              <a:spcBef>
+                <a:spcPts val="400"/>
+              </a:spcBef>
+            </a:pPr>
+            <a:r>
+              <a:rPr sz="1500" b="0" i="0">
+                <a:solidFill>
+                  <a:srgbClr val="333333"/>
+                </a:solidFill>
+                <a:latin typeface="Apple SD Gothic Neo"/>
+              </a:rPr>
+              <a:t>데이터 구조</a:t>
+            </a:r>
+          </a:p>
+          <a:p>
+            <a:pPr algn="l">
+              <a:lnSpc>
+                <a:spcPct val="118000"/>
+              </a:lnSpc>
+              <a:spcBef>
+                <a:spcPts val="400"/>
+              </a:spcBef>
+            </a:pPr>
+            <a:r>
+              <a:rPr sz="1500" b="0" i="0">
+                <a:solidFill>
+                  <a:srgbClr val="333333"/>
+                </a:solidFill>
+                <a:latin typeface="Apple SD Gothic Neo"/>
+              </a:rPr>
+              <a:t>Inquiry/FAQ/Recommendation</a:t>
+            </a:r>
+          </a:p>
+        </p:txBody>
+      </p:sp>
+      <p:sp>
+        <p:nvSpPr>
+          <p:cNvPr id="7" name="TextBox 6"/>
           <p:cNvSpPr txBox="1"/>
           <p:nvPr/>
         </p:nvSpPr>
         <p:spPr>
           <a:xfrm>
-            <a:off x="8217316" y="1811640"/>
-            <a:ext cx="3305738" cy="450000"/>
+            <a:off x="548640" y="6080760"/>
+            <a:ext cx="11094415" cy="457200"/>
           </a:xfrm>
           <a:prstGeom prst="rect">
             <a:avLst/>
@@ -24400,31 +23220,31 @@
           <a:p>
             <a:pPr algn="l">
               <a:lnSpc>
-                <a:spcPct val="115000"/>
-              </a:lnSpc>
-            </a:pPr>
-            <a:r>
-              <a:rPr sz="1700" b="1" i="0">
-                <a:solidFill>
-                  <a:srgbClr val="111111"/>
-                </a:solidFill>
-                <a:latin typeface="Apple SD Gothic Neo"/>
-              </a:rPr>
-              <a:t>ERD</a:t>
-            </a:r>
-          </a:p>
-        </p:txBody>
-      </p:sp>
-      <p:sp>
-        <p:nvSpPr>
-          <p:cNvPr id="12" name="TextBox 11"/>
+                <a:spcPct val="130000"/>
+              </a:lnSpc>
+            </a:pPr>
+            <a:r>
+              <a:rPr sz="1200" b="0" i="0">
+                <a:solidFill>
+                  <a:srgbClr val="333333"/>
+                </a:solidFill>
+                <a:latin typeface="Apple SD Gothic Neo"/>
+              </a:rPr>
+              <a:t>참고 — docs/11-mermaid-diagram-guide.md</a:t>
+            </a:r>
+          </a:p>
+        </p:txBody>
+      </p:sp>
+      <p:sp>
+        <p:nvSpPr>
+          <p:cNvPr id="8" name="TextBox 7"/>
           <p:cNvSpPr txBox="1"/>
           <p:nvPr/>
         </p:nvSpPr>
         <p:spPr>
           <a:xfrm>
-            <a:off x="8217316" y="2231640"/>
-            <a:ext cx="3305738" cy="2906160"/>
+            <a:off x="548640" y="6492240"/>
+            <a:ext cx="5486400" cy="274320"/>
           </a:xfrm>
           <a:prstGeom prst="rect">
             <a:avLst/>
@@ -24439,110 +23259,16 @@
           <a:p>
             <a:pPr algn="l">
               <a:lnSpc>
-                <a:spcPct val="125000"/>
-              </a:lnSpc>
-            </a:pPr>
-            <a:r>
-              <a:rPr sz="1500" b="0" i="0">
+                <a:spcPct val="115000"/>
+              </a:lnSpc>
+            </a:pPr>
+            <a:r>
+              <a:rPr sz="1200" b="0" i="0">
                 <a:solidFill>
                   <a:srgbClr val="333333"/>
                 </a:solidFill>
                 <a:latin typeface="Apple SD Gothic Neo"/>
               </a:rPr>
-              <a:t>데이터 구조</a:t>
-            </a:r>
-          </a:p>
-          <a:p>
-            <a:pPr algn="l">
-              <a:lnSpc>
-                <a:spcPct val="125000"/>
-              </a:lnSpc>
-            </a:pPr>
-            <a:r>
-              <a:rPr sz="1500" b="0" i="0">
-                <a:solidFill>
-                  <a:srgbClr val="333333"/>
-                </a:solidFill>
-                <a:latin typeface="Apple SD Gothic Neo"/>
-              </a:rPr>
-              <a:t>Inquiry/FAQ/Recommendation</a:t>
-            </a:r>
-          </a:p>
-        </p:txBody>
-      </p:sp>
-      <p:sp>
-        <p:nvSpPr>
-          <p:cNvPr id="13" name="TextBox 12"/>
-          <p:cNvSpPr txBox="1"/>
-          <p:nvPr/>
-        </p:nvSpPr>
-        <p:spPr>
-          <a:xfrm>
-            <a:off x="548640" y="6080760"/>
-            <a:ext cx="11094415" cy="457200"/>
-          </a:xfrm>
-          <a:prstGeom prst="rect">
-            <a:avLst/>
-          </a:prstGeom>
-          <a:noFill/>
-        </p:spPr>
-        <p:txBody>
-          <a:bodyPr wrap="square" lIns="0" rIns="0" tIns="0" bIns="0" anchor="t">
-            <a:spAutoFit/>
-          </a:bodyPr>
-          <a:lstStyle/>
-          <a:p>
-            <a:pPr algn="l">
-              <a:lnSpc>
-                <a:spcPct val="130000"/>
-              </a:lnSpc>
-            </a:pPr>
-            <a:r>
-              <a:rPr sz="1200" b="0" i="0">
-                <a:solidFill>
-                  <a:srgbClr val="333333"/>
-                </a:solidFill>
-                <a:latin typeface="Apple SD Gothic Neo"/>
-              </a:rPr>
-              <a:t>참고 — docs/11-mermaid-diagram-guide.md</a:t>
-            </a:r>
-          </a:p>
-        </p:txBody>
-      </p:sp>
-      <p:sp>
-        <p:nvSpPr>
-          <p:cNvPr id="14" name="TextBox 13"/>
-          <p:cNvSpPr txBox="1"/>
-          <p:nvPr/>
-        </p:nvSpPr>
-        <p:spPr>
-          <a:xfrm>
-            <a:off x="548640" y="6492240"/>
-            <a:ext cx="5486400" cy="274320"/>
-          </a:xfrm>
-          <a:prstGeom prst="rect">
-            <a:avLst/>
-          </a:prstGeom>
-          <a:noFill/>
-        </p:spPr>
-        <p:txBody>
-          <a:bodyPr wrap="square" lIns="0" rIns="0" tIns="0" bIns="0" anchor="t">
-            <a:spAutoFit/>
-          </a:bodyPr>
-          <a:lstStyle/>
-          <a:p>
-            <a:pPr algn="l">
-              <a:lnSpc>
-                <a:spcPct val="115000"/>
-              </a:lnSpc>
-            </a:pPr>
-            <a:r>
-              <a:rPr sz="1200" b="0" i="0">
-                <a:solidFill>
-                  <a:srgbClr val="333333"/>
-                </a:solidFill>
-                <a:latin typeface="Apple SD Gothic Neo"/>
-              </a:rPr>
               <a:t>개발자에서 AI Native로 · 서울AI재단 5시간 워크숍</a:t>
             </a:r>
           </a:p>
@@ -24550,7 +23276,7 @@
       </p:sp>
       <p:sp>
         <p:nvSpPr>
-          <p:cNvPr id="15" name="TextBox 14"/>
+          <p:cNvPr id="9" name="TextBox 8"/>
           <p:cNvSpPr txBox="1"/>
           <p:nvPr/>
         </p:nvSpPr>
@@ -28316,8 +27042,8 @@
         </p:nvSpPr>
         <p:spPr>
           <a:xfrm>
-            <a:off x="6278727" y="1737360"/>
-            <a:ext cx="5364327" cy="2194560"/>
+            <a:off x="6278727" y="1600200"/>
+            <a:ext cx="5364327" cy="2290572"/>
           </a:xfrm>
           <a:prstGeom prst="roundRect">
             <a:avLst>
@@ -28349,33 +27075,7 @@
           </a:fontRef>
         </p:style>
         <p:txBody>
-          <a:bodyPr rtlCol="0" anchor="ctr"/>
-          <a:lstStyle/>
-          <a:p>
-            <a:pPr algn="ctr"/>
-          </a:p>
-        </p:txBody>
-      </p:sp>
-      <p:sp>
-        <p:nvSpPr>
-          <p:cNvPr id="6" name="TextBox 5"/>
-          <p:cNvSpPr txBox="1"/>
-          <p:nvPr/>
-        </p:nvSpPr>
-        <p:spPr>
-          <a:xfrm>
-            <a:off x="6398727" y="1857360"/>
-            <a:ext cx="5124327" cy="450000"/>
-          </a:xfrm>
-          <a:prstGeom prst="rect">
-            <a:avLst/>
-          </a:prstGeom>
-          <a:noFill/>
-        </p:spPr>
-        <p:txBody>
-          <a:bodyPr wrap="square" lIns="0" rIns="0" tIns="0" bIns="0" anchor="t">
-            <a:spAutoFit/>
-          </a:bodyPr>
+          <a:bodyPr rtlCol="0" anchor="t" wrap="square" lIns="110000" rIns="110000" tIns="95000" bIns="95000"/>
           <a:lstStyle/>
           <a:p>
             <a:pPr algn="l">
@@ -28393,34 +27093,14 @@
               <a:t>Now</a:t>
             </a:r>
           </a:p>
-        </p:txBody>
-      </p:sp>
-      <p:sp>
-        <p:nvSpPr>
-          <p:cNvPr id="7" name="TextBox 6"/>
-          <p:cNvSpPr txBox="1"/>
-          <p:nvPr/>
-        </p:nvSpPr>
-        <p:spPr>
-          <a:xfrm>
-            <a:off x="6398727" y="2277360"/>
-            <a:ext cx="5124327" cy="1534560"/>
-          </a:xfrm>
-          <a:prstGeom prst="rect">
-            <a:avLst/>
-          </a:prstGeom>
-          <a:noFill/>
-        </p:spPr>
-        <p:txBody>
-          <a:bodyPr wrap="square" lIns="0" rIns="0" tIns="0" bIns="0" anchor="t">
-            <a:spAutoFit/>
-          </a:bodyPr>
-          <a:lstStyle/>
-          <a:p>
-            <a:pPr algn="l">
-              <a:lnSpc>
-                <a:spcPct val="125000"/>
-              </a:lnSpc>
+          <a:p>
+            <a:pPr algn="l">
+              <a:lnSpc>
+                <a:spcPct val="118000"/>
+              </a:lnSpc>
+              <a:spcBef>
+                <a:spcPts val="400"/>
+              </a:spcBef>
             </a:pPr>
             <a:r>
               <a:rPr sz="1500" b="0" i="0">
@@ -28435,8 +27115,11 @@
           <a:p>
             <a:pPr algn="l">
               <a:lnSpc>
-                <a:spcPct val="125000"/>
-              </a:lnSpc>
+                <a:spcPct val="118000"/>
+              </a:lnSpc>
+              <a:spcBef>
+                <a:spcPts val="400"/>
+              </a:spcBef>
             </a:pPr>
             <a:r>
               <a:rPr sz="1500" b="0" i="0">
@@ -28451,8 +27134,11 @@
           <a:p>
             <a:pPr algn="l">
               <a:lnSpc>
-                <a:spcPct val="125000"/>
-              </a:lnSpc>
+                <a:spcPct val="118000"/>
+              </a:lnSpc>
+              <a:spcBef>
+                <a:spcPts val="400"/>
+              </a:spcBef>
             </a:pPr>
             <a:r>
               <a:rPr sz="1500" b="0" i="0">
@@ -28468,14 +27154,14 @@
       </p:sp>
       <p:sp>
         <p:nvSpPr>
-          <p:cNvPr id="8" name="Rounded Rectangle 7"/>
+          <p:cNvPr id="6" name="Rounded Rectangle 5"/>
           <p:cNvSpPr/>
           <p:nvPr/>
         </p:nvSpPr>
         <p:spPr>
           <a:xfrm>
-            <a:off x="6278727" y="4114800"/>
-            <a:ext cx="5364327" cy="2194560"/>
+            <a:off x="6278727" y="4018788"/>
+            <a:ext cx="5364327" cy="2290572"/>
           </a:xfrm>
           <a:prstGeom prst="roundRect">
             <a:avLst>
@@ -28507,23 +27193,93 @@
           </a:fontRef>
         </p:style>
         <p:txBody>
-          <a:bodyPr rtlCol="0" anchor="ctr"/>
-          <a:lstStyle/>
-          <a:p>
-            <a:pPr algn="ctr"/>
-          </a:p>
-        </p:txBody>
-      </p:sp>
-      <p:sp>
-        <p:nvSpPr>
-          <p:cNvPr id="9" name="TextBox 8"/>
+          <a:bodyPr rtlCol="0" anchor="t" wrap="square" lIns="110000" rIns="110000" tIns="95000" bIns="95000"/>
+          <a:lstStyle/>
+          <a:p>
+            <a:pPr algn="l">
+              <a:lnSpc>
+                <a:spcPct val="115000"/>
+              </a:lnSpc>
+            </a:pPr>
+            <a:r>
+              <a:rPr sz="1700" b="1" i="0">
+                <a:solidFill>
+                  <a:srgbClr val="123C7C"/>
+                </a:solidFill>
+                <a:latin typeface="Apple SD Gothic Neo"/>
+              </a:rPr>
+              <a:t>Later</a:t>
+            </a:r>
+          </a:p>
+          <a:p>
+            <a:pPr algn="l">
+              <a:lnSpc>
+                <a:spcPct val="118000"/>
+              </a:lnSpc>
+              <a:spcBef>
+                <a:spcPts val="400"/>
+              </a:spcBef>
+            </a:pPr>
+            <a:r>
+              <a:rPr sz="1500" b="0" i="0">
+                <a:solidFill>
+                  <a:srgbClr val="333333"/>
+                </a:solidFill>
+                <a:latin typeface="Apple SD Gothic Neo"/>
+              </a:rPr>
+              <a:t>Claude API / 다른 LLM 교체</a:t>
+            </a:r>
+          </a:p>
+          <a:p>
+            <a:pPr algn="l">
+              <a:lnSpc>
+                <a:spcPct val="118000"/>
+              </a:lnSpc>
+              <a:spcBef>
+                <a:spcPts val="400"/>
+              </a:spcBef>
+            </a:pPr>
+            <a:r>
+              <a:rPr sz="1500" b="0" i="0">
+                <a:solidFill>
+                  <a:srgbClr val="333333"/>
+                </a:solidFill>
+                <a:latin typeface="Apple SD Gothic Neo"/>
+              </a:rPr>
+              <a:t>RAG / 정책 검색 추가</a:t>
+            </a:r>
+          </a:p>
+          <a:p>
+            <a:pPr algn="l">
+              <a:lnSpc>
+                <a:spcPct val="118000"/>
+              </a:lnSpc>
+              <a:spcBef>
+                <a:spcPts val="400"/>
+              </a:spcBef>
+            </a:pPr>
+            <a:r>
+              <a:rPr sz="1500" b="0" i="0">
+                <a:solidFill>
+                  <a:srgbClr val="333333"/>
+                </a:solidFill>
+                <a:latin typeface="Apple SD Gothic Neo"/>
+              </a:rPr>
+              <a:t>평가 데이터 축적</a:t>
+            </a:r>
+          </a:p>
+        </p:txBody>
+      </p:sp>
+      <p:sp>
+        <p:nvSpPr>
+          <p:cNvPr id="7" name="TextBox 6"/>
           <p:cNvSpPr txBox="1"/>
           <p:nvPr/>
         </p:nvSpPr>
         <p:spPr>
           <a:xfrm>
-            <a:off x="6398727" y="4234800"/>
-            <a:ext cx="5124327" cy="450000"/>
+            <a:off x="548640" y="6492240"/>
+            <a:ext cx="5486400" cy="274320"/>
           </a:xfrm>
           <a:prstGeom prst="rect">
             <a:avLst/>
@@ -28542,122 +27298,12 @@
               </a:lnSpc>
             </a:pPr>
             <a:r>
-              <a:rPr sz="1700" b="1" i="0">
-                <a:solidFill>
-                  <a:srgbClr val="123C7C"/>
-                </a:solidFill>
-                <a:latin typeface="Apple SD Gothic Neo"/>
-              </a:rPr>
-              <a:t>Later</a:t>
-            </a:r>
-          </a:p>
-        </p:txBody>
-      </p:sp>
-      <p:sp>
-        <p:nvSpPr>
-          <p:cNvPr id="10" name="TextBox 9"/>
-          <p:cNvSpPr txBox="1"/>
-          <p:nvPr/>
-        </p:nvSpPr>
-        <p:spPr>
-          <a:xfrm>
-            <a:off x="6398727" y="4654800"/>
-            <a:ext cx="5124327" cy="1534560"/>
-          </a:xfrm>
-          <a:prstGeom prst="rect">
-            <a:avLst/>
-          </a:prstGeom>
-          <a:noFill/>
-        </p:spPr>
-        <p:txBody>
-          <a:bodyPr wrap="square" lIns="0" rIns="0" tIns="0" bIns="0" anchor="t">
-            <a:spAutoFit/>
-          </a:bodyPr>
-          <a:lstStyle/>
-          <a:p>
-            <a:pPr algn="l">
-              <a:lnSpc>
-                <a:spcPct val="125000"/>
-              </a:lnSpc>
-            </a:pPr>
-            <a:r>
-              <a:rPr sz="1500" b="0" i="0">
+              <a:rPr sz="1200" b="0" i="0">
                 <a:solidFill>
                   <a:srgbClr val="333333"/>
                 </a:solidFill>
                 <a:latin typeface="Apple SD Gothic Neo"/>
               </a:rPr>
-              <a:t>Claude API / 다른 LLM 교체</a:t>
-            </a:r>
-          </a:p>
-          <a:p>
-            <a:pPr algn="l">
-              <a:lnSpc>
-                <a:spcPct val="125000"/>
-              </a:lnSpc>
-            </a:pPr>
-            <a:r>
-              <a:rPr sz="1500" b="0" i="0">
-                <a:solidFill>
-                  <a:srgbClr val="333333"/>
-                </a:solidFill>
-                <a:latin typeface="Apple SD Gothic Neo"/>
-              </a:rPr>
-              <a:t>RAG / 정책 검색 추가</a:t>
-            </a:r>
-          </a:p>
-          <a:p>
-            <a:pPr algn="l">
-              <a:lnSpc>
-                <a:spcPct val="125000"/>
-              </a:lnSpc>
-            </a:pPr>
-            <a:r>
-              <a:rPr sz="1500" b="0" i="0">
-                <a:solidFill>
-                  <a:srgbClr val="333333"/>
-                </a:solidFill>
-                <a:latin typeface="Apple SD Gothic Neo"/>
-              </a:rPr>
-              <a:t>평가 데이터 축적</a:t>
-            </a:r>
-          </a:p>
-        </p:txBody>
-      </p:sp>
-      <p:sp>
-        <p:nvSpPr>
-          <p:cNvPr id="11" name="TextBox 10"/>
-          <p:cNvSpPr txBox="1"/>
-          <p:nvPr/>
-        </p:nvSpPr>
-        <p:spPr>
-          <a:xfrm>
-            <a:off x="548640" y="6492240"/>
-            <a:ext cx="5486400" cy="274320"/>
-          </a:xfrm>
-          <a:prstGeom prst="rect">
-            <a:avLst/>
-          </a:prstGeom>
-          <a:noFill/>
-        </p:spPr>
-        <p:txBody>
-          <a:bodyPr wrap="square" lIns="0" rIns="0" tIns="0" bIns="0" anchor="t">
-            <a:spAutoFit/>
-          </a:bodyPr>
-          <a:lstStyle/>
-          <a:p>
-            <a:pPr algn="l">
-              <a:lnSpc>
-                <a:spcPct val="115000"/>
-              </a:lnSpc>
-            </a:pPr>
-            <a:r>
-              <a:rPr sz="1200" b="0" i="0">
-                <a:solidFill>
-                  <a:srgbClr val="333333"/>
-                </a:solidFill>
-                <a:latin typeface="Apple SD Gothic Neo"/>
-              </a:rPr>
               <a:t>개발자에서 AI Native로 · 서울AI재단 5시간 워크숍</a:t>
             </a:r>
           </a:p>
@@ -28665,7 +27311,7 @@
       </p:sp>
       <p:sp>
         <p:nvSpPr>
-          <p:cNvPr id="12" name="TextBox 11"/>
+          <p:cNvPr id="8" name="TextBox 7"/>
           <p:cNvSpPr txBox="1"/>
           <p:nvPr/>
         </p:nvSpPr>
@@ -40721,33 +39367,7 @@
           </a:fontRef>
         </p:style>
         <p:txBody>
-          <a:bodyPr rtlCol="0" anchor="ctr"/>
-          <a:lstStyle/>
-          <a:p>
-            <a:pPr algn="ctr"/>
-          </a:p>
-        </p:txBody>
-      </p:sp>
-      <p:sp>
-        <p:nvSpPr>
-          <p:cNvPr id="5" name="TextBox 4"/>
-          <p:cNvSpPr txBox="1"/>
-          <p:nvPr/>
-        </p:nvSpPr>
-        <p:spPr>
-          <a:xfrm>
-            <a:off x="668640" y="1811640"/>
-            <a:ext cx="3305738" cy="450000"/>
-          </a:xfrm>
-          <a:prstGeom prst="rect">
-            <a:avLst/>
-          </a:prstGeom>
-          <a:noFill/>
-        </p:spPr>
-        <p:txBody>
-          <a:bodyPr wrap="square" lIns="0" rIns="0" tIns="0" bIns="0" anchor="t">
-            <a:spAutoFit/>
-          </a:bodyPr>
+          <a:bodyPr rtlCol="0" anchor="t" wrap="square" lIns="110000" rIns="110000" tIns="95000" bIns="95000"/>
           <a:lstStyle/>
           <a:p>
             <a:pPr algn="l">
@@ -40765,34 +39385,14 @@
               <a:t>FAQ에 없는 문의</a:t>
             </a:r>
           </a:p>
-        </p:txBody>
-      </p:sp>
-      <p:sp>
-        <p:nvSpPr>
-          <p:cNvPr id="6" name="TextBox 5"/>
-          <p:cNvSpPr txBox="1"/>
-          <p:nvPr/>
-        </p:nvSpPr>
-        <p:spPr>
-          <a:xfrm>
-            <a:off x="668640" y="2231640"/>
-            <a:ext cx="3305738" cy="1328820"/>
-          </a:xfrm>
-          <a:prstGeom prst="rect">
-            <a:avLst/>
-          </a:prstGeom>
-          <a:noFill/>
-        </p:spPr>
-        <p:txBody>
-          <a:bodyPr wrap="square" lIns="0" rIns="0" tIns="0" bIns="0" anchor="t">
-            <a:spAutoFit/>
-          </a:bodyPr>
-          <a:lstStyle/>
-          <a:p>
-            <a:pPr algn="l">
-              <a:lnSpc>
-                <a:spcPct val="125000"/>
-              </a:lnSpc>
+          <a:p>
+            <a:pPr algn="l">
+              <a:lnSpc>
+                <a:spcPct val="118000"/>
+              </a:lnSpc>
+              <a:spcBef>
+                <a:spcPts val="400"/>
+              </a:spcBef>
             </a:pPr>
             <a:r>
               <a:rPr sz="1500" b="0" i="0">
@@ -40808,7 +39408,7 @@
       </p:sp>
       <p:sp>
         <p:nvSpPr>
-          <p:cNvPr id="7" name="Rounded Rectangle 6"/>
+          <p:cNvPr id="5" name="Rounded Rectangle 4"/>
           <p:cNvSpPr/>
           <p:nvPr/>
         </p:nvSpPr>
@@ -40847,33 +39447,7 @@
           </a:fontRef>
         </p:style>
         <p:txBody>
-          <a:bodyPr rtlCol="0" anchor="ctr"/>
-          <a:lstStyle/>
-          <a:p>
-            <a:pPr algn="ctr"/>
-          </a:p>
-        </p:txBody>
-      </p:sp>
-      <p:sp>
-        <p:nvSpPr>
-          <p:cNvPr id="8" name="TextBox 7"/>
-          <p:cNvSpPr txBox="1"/>
-          <p:nvPr/>
-        </p:nvSpPr>
-        <p:spPr>
-          <a:xfrm>
-            <a:off x="4442978" y="1811640"/>
-            <a:ext cx="3305738" cy="450000"/>
-          </a:xfrm>
-          <a:prstGeom prst="rect">
-            <a:avLst/>
-          </a:prstGeom>
-          <a:noFill/>
-        </p:spPr>
-        <p:txBody>
-          <a:bodyPr wrap="square" lIns="0" rIns="0" tIns="0" bIns="0" anchor="t">
-            <a:spAutoFit/>
-          </a:bodyPr>
+          <a:bodyPr rtlCol="0" anchor="t" wrap="square" lIns="110000" rIns="110000" tIns="95000" bIns="95000"/>
           <a:lstStyle/>
           <a:p>
             <a:pPr algn="l">
@@ -40891,34 +39465,14 @@
               <a:t>감정이 강한 민원</a:t>
             </a:r>
           </a:p>
-        </p:txBody>
-      </p:sp>
-      <p:sp>
-        <p:nvSpPr>
-          <p:cNvPr id="9" name="TextBox 8"/>
-          <p:cNvSpPr txBox="1"/>
-          <p:nvPr/>
-        </p:nvSpPr>
-        <p:spPr>
-          <a:xfrm>
-            <a:off x="4442978" y="2231640"/>
-            <a:ext cx="3305738" cy="1328820"/>
-          </a:xfrm>
-          <a:prstGeom prst="rect">
-            <a:avLst/>
-          </a:prstGeom>
-          <a:noFill/>
-        </p:spPr>
-        <p:txBody>
-          <a:bodyPr wrap="square" lIns="0" rIns="0" tIns="0" bIns="0" anchor="t">
-            <a:spAutoFit/>
-          </a:bodyPr>
-          <a:lstStyle/>
-          <a:p>
-            <a:pPr algn="l">
-              <a:lnSpc>
-                <a:spcPct val="125000"/>
-              </a:lnSpc>
+          <a:p>
+            <a:pPr algn="l">
+              <a:lnSpc>
+                <a:spcPct val="118000"/>
+              </a:lnSpc>
+              <a:spcBef>
+                <a:spcPts val="400"/>
+              </a:spcBef>
             </a:pPr>
             <a:r>
               <a:rPr sz="1500" b="0" i="0">
@@ -40934,7 +39488,7 @@
       </p:sp>
       <p:sp>
         <p:nvSpPr>
-          <p:cNvPr id="10" name="Rounded Rectangle 9"/>
+          <p:cNvPr id="6" name="Rounded Rectangle 5"/>
           <p:cNvSpPr/>
           <p:nvPr/>
         </p:nvSpPr>
@@ -40973,33 +39527,7 @@
           </a:fontRef>
         </p:style>
         <p:txBody>
-          <a:bodyPr rtlCol="0" anchor="ctr"/>
-          <a:lstStyle/>
-          <a:p>
-            <a:pPr algn="ctr"/>
-          </a:p>
-        </p:txBody>
-      </p:sp>
-      <p:sp>
-        <p:nvSpPr>
-          <p:cNvPr id="11" name="TextBox 10"/>
-          <p:cNvSpPr txBox="1"/>
-          <p:nvPr/>
-        </p:nvSpPr>
-        <p:spPr>
-          <a:xfrm>
-            <a:off x="8217316" y="1811640"/>
-            <a:ext cx="3305738" cy="450000"/>
-          </a:xfrm>
-          <a:prstGeom prst="rect">
-            <a:avLst/>
-          </a:prstGeom>
-          <a:noFill/>
-        </p:spPr>
-        <p:txBody>
-          <a:bodyPr wrap="square" lIns="0" rIns="0" tIns="0" bIns="0" anchor="t">
-            <a:spAutoFit/>
-          </a:bodyPr>
+          <a:bodyPr rtlCol="0" anchor="t" wrap="square" lIns="110000" rIns="110000" tIns="95000" bIns="95000"/>
           <a:lstStyle/>
           <a:p>
             <a:pPr algn="l">
@@ -41017,34 +39545,14 @@
               <a:t>정책 판단 필요</a:t>
             </a:r>
           </a:p>
-        </p:txBody>
-      </p:sp>
-      <p:sp>
-        <p:nvSpPr>
-          <p:cNvPr id="12" name="TextBox 11"/>
-          <p:cNvSpPr txBox="1"/>
-          <p:nvPr/>
-        </p:nvSpPr>
-        <p:spPr>
-          <a:xfrm>
-            <a:off x="8217316" y="2231640"/>
-            <a:ext cx="3305738" cy="1328820"/>
-          </a:xfrm>
-          <a:prstGeom prst="rect">
-            <a:avLst/>
-          </a:prstGeom>
-          <a:noFill/>
-        </p:spPr>
-        <p:txBody>
-          <a:bodyPr wrap="square" lIns="0" rIns="0" tIns="0" bIns="0" anchor="t">
-            <a:spAutoFit/>
-          </a:bodyPr>
-          <a:lstStyle/>
-          <a:p>
-            <a:pPr algn="l">
-              <a:lnSpc>
-                <a:spcPct val="125000"/>
-              </a:lnSpc>
+          <a:p>
+            <a:pPr algn="l">
+              <a:lnSpc>
+                <a:spcPct val="118000"/>
+              </a:lnSpc>
+              <a:spcBef>
+                <a:spcPts val="400"/>
+              </a:spcBef>
             </a:pPr>
             <a:r>
               <a:rPr sz="1500" b="0" i="0">
@@ -41060,7 +39568,7 @@
       </p:sp>
       <p:sp>
         <p:nvSpPr>
-          <p:cNvPr id="13" name="Rounded Rectangle 12"/>
+          <p:cNvPr id="7" name="Rounded Rectangle 6"/>
           <p:cNvSpPr/>
           <p:nvPr/>
         </p:nvSpPr>
@@ -41099,33 +39607,7 @@
           </a:fontRef>
         </p:style>
         <p:txBody>
-          <a:bodyPr rtlCol="0" anchor="ctr"/>
-          <a:lstStyle/>
-          <a:p>
-            <a:pPr algn="ctr"/>
-          </a:p>
-        </p:txBody>
-      </p:sp>
-      <p:sp>
-        <p:nvSpPr>
-          <p:cNvPr id="14" name="TextBox 13"/>
-          <p:cNvSpPr txBox="1"/>
-          <p:nvPr/>
-        </p:nvSpPr>
-        <p:spPr>
-          <a:xfrm>
-            <a:off x="668640" y="4029060"/>
-            <a:ext cx="3305738" cy="450000"/>
-          </a:xfrm>
-          <a:prstGeom prst="rect">
-            <a:avLst/>
-          </a:prstGeom>
-          <a:noFill/>
-        </p:spPr>
-        <p:txBody>
-          <a:bodyPr wrap="square" lIns="0" rIns="0" tIns="0" bIns="0" anchor="t">
-            <a:spAutoFit/>
-          </a:bodyPr>
+          <a:bodyPr rtlCol="0" anchor="t" wrap="square" lIns="110000" rIns="110000" tIns="95000" bIns="95000"/>
           <a:lstStyle/>
           <a:p>
             <a:pPr algn="l">
@@ -41143,34 +39625,14 @@
               <a:t>개인정보 포함</a:t>
             </a:r>
           </a:p>
-        </p:txBody>
-      </p:sp>
-      <p:sp>
-        <p:nvSpPr>
-          <p:cNvPr id="15" name="TextBox 14"/>
-          <p:cNvSpPr txBox="1"/>
-          <p:nvPr/>
-        </p:nvSpPr>
-        <p:spPr>
-          <a:xfrm>
-            <a:off x="668640" y="4449060"/>
-            <a:ext cx="3305738" cy="1328820"/>
-          </a:xfrm>
-          <a:prstGeom prst="rect">
-            <a:avLst/>
-          </a:prstGeom>
-          <a:noFill/>
-        </p:spPr>
-        <p:txBody>
-          <a:bodyPr wrap="square" lIns="0" rIns="0" tIns="0" bIns="0" anchor="t">
-            <a:spAutoFit/>
-          </a:bodyPr>
-          <a:lstStyle/>
-          <a:p>
-            <a:pPr algn="l">
-              <a:lnSpc>
-                <a:spcPct val="125000"/>
-              </a:lnSpc>
+          <a:p>
+            <a:pPr algn="l">
+              <a:lnSpc>
+                <a:spcPct val="118000"/>
+              </a:lnSpc>
+              <a:spcBef>
+                <a:spcPts val="400"/>
+              </a:spcBef>
             </a:pPr>
             <a:r>
               <a:rPr sz="1500" b="0" i="0">
@@ -41186,7 +39648,7 @@
       </p:sp>
       <p:sp>
         <p:nvSpPr>
-          <p:cNvPr id="16" name="Rounded Rectangle 15"/>
+          <p:cNvPr id="8" name="Rounded Rectangle 7"/>
           <p:cNvSpPr/>
           <p:nvPr/>
         </p:nvSpPr>
@@ -41225,33 +39687,7 @@
           </a:fontRef>
         </p:style>
         <p:txBody>
-          <a:bodyPr rtlCol="0" anchor="ctr"/>
-          <a:lstStyle/>
-          <a:p>
-            <a:pPr algn="ctr"/>
-          </a:p>
-        </p:txBody>
-      </p:sp>
-      <p:sp>
-        <p:nvSpPr>
-          <p:cNvPr id="17" name="TextBox 16"/>
-          <p:cNvSpPr txBox="1"/>
-          <p:nvPr/>
-        </p:nvSpPr>
-        <p:spPr>
-          <a:xfrm>
-            <a:off x="4442978" y="4029060"/>
-            <a:ext cx="3305738" cy="450000"/>
-          </a:xfrm>
-          <a:prstGeom prst="rect">
-            <a:avLst/>
-          </a:prstGeom>
-          <a:noFill/>
-        </p:spPr>
-        <p:txBody>
-          <a:bodyPr wrap="square" lIns="0" rIns="0" tIns="0" bIns="0" anchor="t">
-            <a:spAutoFit/>
-          </a:bodyPr>
+          <a:bodyPr rtlCol="0" anchor="t" wrap="square" lIns="110000" rIns="110000" tIns="95000" bIns="95000"/>
           <a:lstStyle/>
           <a:p>
             <a:pPr algn="l">
@@ -41269,34 +39705,14 @@
               <a:t>여러 주제 혼재</a:t>
             </a:r>
           </a:p>
-        </p:txBody>
-      </p:sp>
-      <p:sp>
-        <p:nvSpPr>
-          <p:cNvPr id="18" name="TextBox 17"/>
-          <p:cNvSpPr txBox="1"/>
-          <p:nvPr/>
-        </p:nvSpPr>
-        <p:spPr>
-          <a:xfrm>
-            <a:off x="4442978" y="4449060"/>
-            <a:ext cx="3305738" cy="1328820"/>
-          </a:xfrm>
-          <a:prstGeom prst="rect">
-            <a:avLst/>
-          </a:prstGeom>
-          <a:noFill/>
-        </p:spPr>
-        <p:txBody>
-          <a:bodyPr wrap="square" lIns="0" rIns="0" tIns="0" bIns="0" anchor="t">
-            <a:spAutoFit/>
-          </a:bodyPr>
-          <a:lstStyle/>
-          <a:p>
-            <a:pPr algn="l">
-              <a:lnSpc>
-                <a:spcPct val="125000"/>
-              </a:lnSpc>
+          <a:p>
+            <a:pPr algn="l">
+              <a:lnSpc>
+                <a:spcPct val="118000"/>
+              </a:lnSpc>
+              <a:spcBef>
+                <a:spcPts val="400"/>
+              </a:spcBef>
             </a:pPr>
             <a:r>
               <a:rPr sz="1500" b="0" i="0">
@@ -41312,7 +39728,7 @@
       </p:sp>
       <p:sp>
         <p:nvSpPr>
-          <p:cNvPr id="19" name="Rounded Rectangle 18"/>
+          <p:cNvPr id="9" name="Rounded Rectangle 8"/>
           <p:cNvSpPr/>
           <p:nvPr/>
         </p:nvSpPr>
@@ -41351,23 +39767,55 @@
           </a:fontRef>
         </p:style>
         <p:txBody>
-          <a:bodyPr rtlCol="0" anchor="ctr"/>
-          <a:lstStyle/>
-          <a:p>
-            <a:pPr algn="ctr"/>
-          </a:p>
-        </p:txBody>
-      </p:sp>
-      <p:sp>
-        <p:nvSpPr>
-          <p:cNvPr id="20" name="TextBox 19"/>
+          <a:bodyPr rtlCol="0" anchor="t" wrap="square" lIns="110000" rIns="110000" tIns="95000" bIns="95000"/>
+          <a:lstStyle/>
+          <a:p>
+            <a:pPr algn="l">
+              <a:lnSpc>
+                <a:spcPct val="115000"/>
+              </a:lnSpc>
+            </a:pPr>
+            <a:r>
+              <a:rPr sz="1700" b="1" i="0">
+                <a:solidFill>
+                  <a:srgbClr val="111111"/>
+                </a:solidFill>
+                <a:latin typeface="Apple SD Gothic Neo"/>
+              </a:rPr>
+              <a:t>—</a:t>
+            </a:r>
+          </a:p>
+          <a:p>
+            <a:pPr algn="l">
+              <a:lnSpc>
+                <a:spcPct val="118000"/>
+              </a:lnSpc>
+              <a:spcBef>
+                <a:spcPts val="400"/>
+              </a:spcBef>
+            </a:pPr>
+            <a:r>
+              <a:rPr sz="1500" b="0" i="0">
+                <a:solidFill>
+                  <a:srgbClr val="333333"/>
+                </a:solidFill>
+                <a:latin typeface="Apple SD Gothic Neo"/>
+              </a:rPr>
+              <a:t>일부러 넣어보는 습관</a:t>
+            </a:r>
+          </a:p>
+        </p:txBody>
+      </p:sp>
+      <p:sp>
+        <p:nvSpPr>
+          <p:cNvPr id="10" name="TextBox 9"/>
           <p:cNvSpPr txBox="1"/>
           <p:nvPr/>
         </p:nvSpPr>
         <p:spPr>
           <a:xfrm>
-            <a:off x="8217316" y="4029060"/>
-            <a:ext cx="3305738" cy="450000"/>
+            <a:off x="548640" y="6492240"/>
+            <a:ext cx="5486400" cy="274320"/>
           </a:xfrm>
           <a:prstGeom prst="rect">
             <a:avLst/>
@@ -41386,90 +39834,12 @@
               </a:lnSpc>
             </a:pPr>
             <a:r>
-              <a:rPr sz="1700" b="1" i="0">
-                <a:solidFill>
-                  <a:srgbClr val="111111"/>
-                </a:solidFill>
-                <a:latin typeface="Apple SD Gothic Neo"/>
-              </a:rPr>
-              <a:t>—</a:t>
-            </a:r>
-          </a:p>
-        </p:txBody>
-      </p:sp>
-      <p:sp>
-        <p:nvSpPr>
-          <p:cNvPr id="21" name="TextBox 20"/>
-          <p:cNvSpPr txBox="1"/>
-          <p:nvPr/>
-        </p:nvSpPr>
-        <p:spPr>
-          <a:xfrm>
-            <a:off x="8217316" y="4449060"/>
-            <a:ext cx="3305738" cy="1328820"/>
-          </a:xfrm>
-          <a:prstGeom prst="rect">
-            <a:avLst/>
-          </a:prstGeom>
-          <a:noFill/>
-        </p:spPr>
-        <p:txBody>
-          <a:bodyPr wrap="square" lIns="0" rIns="0" tIns="0" bIns="0" anchor="t">
-            <a:spAutoFit/>
-          </a:bodyPr>
-          <a:lstStyle/>
-          <a:p>
-            <a:pPr algn="l">
-              <a:lnSpc>
-                <a:spcPct val="125000"/>
-              </a:lnSpc>
-            </a:pPr>
-            <a:r>
-              <a:rPr sz="1500" b="0" i="0">
+              <a:rPr sz="1200" b="0" i="0">
                 <a:solidFill>
                   <a:srgbClr val="333333"/>
                 </a:solidFill>
                 <a:latin typeface="Apple SD Gothic Neo"/>
               </a:rPr>
-              <a:t>일부러 넣어보는 습관</a:t>
-            </a:r>
-          </a:p>
-        </p:txBody>
-      </p:sp>
-      <p:sp>
-        <p:nvSpPr>
-          <p:cNvPr id="22" name="TextBox 21"/>
-          <p:cNvSpPr txBox="1"/>
-          <p:nvPr/>
-        </p:nvSpPr>
-        <p:spPr>
-          <a:xfrm>
-            <a:off x="548640" y="6492240"/>
-            <a:ext cx="5486400" cy="274320"/>
-          </a:xfrm>
-          <a:prstGeom prst="rect">
-            <a:avLst/>
-          </a:prstGeom>
-          <a:noFill/>
-        </p:spPr>
-        <p:txBody>
-          <a:bodyPr wrap="square" lIns="0" rIns="0" tIns="0" bIns="0" anchor="t">
-            <a:spAutoFit/>
-          </a:bodyPr>
-          <a:lstStyle/>
-          <a:p>
-            <a:pPr algn="l">
-              <a:lnSpc>
-                <a:spcPct val="115000"/>
-              </a:lnSpc>
-            </a:pPr>
-            <a:r>
-              <a:rPr sz="1200" b="0" i="0">
-                <a:solidFill>
-                  <a:srgbClr val="333333"/>
-                </a:solidFill>
-                <a:latin typeface="Apple SD Gothic Neo"/>
-              </a:rPr>
               <a:t>개발자에서 AI Native로 · 서울AI재단 5시간 워크숍</a:t>
             </a:r>
           </a:p>
@@ -41477,7 +39847,7 @@
       </p:sp>
       <p:sp>
         <p:nvSpPr>
-          <p:cNvPr id="23" name="TextBox 22"/>
+          <p:cNvPr id="11" name="TextBox 10"/>
           <p:cNvSpPr txBox="1"/>
           <p:nvPr/>
         </p:nvSpPr>
@@ -46170,33 +44540,7 @@
           </a:fontRef>
         </p:style>
         <p:txBody>
-          <a:bodyPr rtlCol="0" anchor="ctr"/>
-          <a:lstStyle/>
-          <a:p>
-            <a:pPr algn="ctr"/>
-          </a:p>
-        </p:txBody>
-      </p:sp>
-      <p:sp>
-        <p:nvSpPr>
-          <p:cNvPr id="5" name="TextBox 4"/>
-          <p:cNvSpPr txBox="1"/>
-          <p:nvPr/>
-        </p:nvSpPr>
-        <p:spPr>
-          <a:xfrm>
-            <a:off x="668640" y="1811640"/>
-            <a:ext cx="5192907" cy="450000"/>
-          </a:xfrm>
-          <a:prstGeom prst="rect">
-            <a:avLst/>
-          </a:prstGeom>
-          <a:noFill/>
-        </p:spPr>
-        <p:txBody>
-          <a:bodyPr wrap="square" lIns="0" rIns="0" tIns="0" bIns="0" anchor="t">
-            <a:spAutoFit/>
-          </a:bodyPr>
+          <a:bodyPr rtlCol="0" anchor="t" wrap="square" lIns="110000" rIns="110000" tIns="95000" bIns="95000"/>
           <a:lstStyle/>
           <a:p>
             <a:pPr algn="l">
@@ -46214,34 +44558,14 @@
               <a:t>PRD 부합도</a:t>
             </a:r>
           </a:p>
-        </p:txBody>
-      </p:sp>
-      <p:sp>
-        <p:nvSpPr>
-          <p:cNvPr id="6" name="TextBox 5"/>
-          <p:cNvSpPr txBox="1"/>
-          <p:nvPr/>
-        </p:nvSpPr>
-        <p:spPr>
-          <a:xfrm>
-            <a:off x="668640" y="2231640"/>
-            <a:ext cx="5192907" cy="1328820"/>
-          </a:xfrm>
-          <a:prstGeom prst="rect">
-            <a:avLst/>
-          </a:prstGeom>
-          <a:noFill/>
-        </p:spPr>
-        <p:txBody>
-          <a:bodyPr wrap="square" lIns="0" rIns="0" tIns="0" bIns="0" anchor="t">
-            <a:spAutoFit/>
-          </a:bodyPr>
-          <a:lstStyle/>
-          <a:p>
-            <a:pPr algn="l">
-              <a:lnSpc>
-                <a:spcPct val="125000"/>
-              </a:lnSpc>
+          <a:p>
+            <a:pPr algn="l">
+              <a:lnSpc>
+                <a:spcPct val="118000"/>
+              </a:lnSpc>
+              <a:spcBef>
+                <a:spcPts val="400"/>
+              </a:spcBef>
             </a:pPr>
             <a:r>
               <a:rPr sz="1500" b="0" i="0">
@@ -46257,7 +44581,7 @@
       </p:sp>
       <p:sp>
         <p:nvSpPr>
-          <p:cNvPr id="7" name="Rounded Rectangle 6"/>
+          <p:cNvPr id="5" name="Rounded Rectangle 4"/>
           <p:cNvSpPr/>
           <p:nvPr/>
         </p:nvSpPr>
@@ -46296,33 +44620,7 @@
           </a:fontRef>
         </p:style>
         <p:txBody>
-          <a:bodyPr rtlCol="0" anchor="ctr"/>
-          <a:lstStyle/>
-          <a:p>
-            <a:pPr algn="ctr"/>
-          </a:p>
-        </p:txBody>
-      </p:sp>
-      <p:sp>
-        <p:nvSpPr>
-          <p:cNvPr id="8" name="TextBox 7"/>
-          <p:cNvSpPr txBox="1"/>
-          <p:nvPr/>
-        </p:nvSpPr>
-        <p:spPr>
-          <a:xfrm>
-            <a:off x="6330147" y="1811640"/>
-            <a:ext cx="5192907" cy="450000"/>
-          </a:xfrm>
-          <a:prstGeom prst="rect">
-            <a:avLst/>
-          </a:prstGeom>
-          <a:noFill/>
-        </p:spPr>
-        <p:txBody>
-          <a:bodyPr wrap="square" lIns="0" rIns="0" tIns="0" bIns="0" anchor="t">
-            <a:spAutoFit/>
-          </a:bodyPr>
+          <a:bodyPr rtlCol="0" anchor="t" wrap="square" lIns="110000" rIns="110000" tIns="95000" bIns="95000"/>
           <a:lstStyle/>
           <a:p>
             <a:pPr algn="l">
@@ -46340,34 +44638,14 @@
               <a:t>사용자 판단</a:t>
             </a:r>
           </a:p>
-        </p:txBody>
-      </p:sp>
-      <p:sp>
-        <p:nvSpPr>
-          <p:cNvPr id="9" name="TextBox 8"/>
-          <p:cNvSpPr txBox="1"/>
-          <p:nvPr/>
-        </p:nvSpPr>
-        <p:spPr>
-          <a:xfrm>
-            <a:off x="6330147" y="2231640"/>
-            <a:ext cx="5192907" cy="1328820"/>
-          </a:xfrm>
-          <a:prstGeom prst="rect">
-            <a:avLst/>
-          </a:prstGeom>
-          <a:noFill/>
-        </p:spPr>
-        <p:txBody>
-          <a:bodyPr wrap="square" lIns="0" rIns="0" tIns="0" bIns="0" anchor="t">
-            <a:spAutoFit/>
-          </a:bodyPr>
-          <a:lstStyle/>
-          <a:p>
-            <a:pPr algn="l">
-              <a:lnSpc>
-                <a:spcPct val="125000"/>
-              </a:lnSpc>
+          <a:p>
+            <a:pPr algn="l">
+              <a:lnSpc>
+                <a:spcPct val="118000"/>
+              </a:lnSpc>
+              <a:spcBef>
+                <a:spcPts val="400"/>
+              </a:spcBef>
             </a:pPr>
             <a:r>
               <a:rPr sz="1500" b="0" i="0">
@@ -46383,7 +44661,7 @@
       </p:sp>
       <p:sp>
         <p:nvSpPr>
-          <p:cNvPr id="10" name="Rounded Rectangle 9"/>
+          <p:cNvPr id="6" name="Rounded Rectangle 5"/>
           <p:cNvSpPr/>
           <p:nvPr/>
         </p:nvSpPr>
@@ -46422,33 +44700,7 @@
           </a:fontRef>
         </p:style>
         <p:txBody>
-          <a:bodyPr rtlCol="0" anchor="ctr"/>
-          <a:lstStyle/>
-          <a:p>
-            <a:pPr algn="ctr"/>
-          </a:p>
-        </p:txBody>
-      </p:sp>
-      <p:sp>
-        <p:nvSpPr>
-          <p:cNvPr id="11" name="TextBox 10"/>
-          <p:cNvSpPr txBox="1"/>
-          <p:nvPr/>
-        </p:nvSpPr>
-        <p:spPr>
-          <a:xfrm>
-            <a:off x="668640" y="4029060"/>
-            <a:ext cx="5192907" cy="450000"/>
-          </a:xfrm>
-          <a:prstGeom prst="rect">
-            <a:avLst/>
-          </a:prstGeom>
-          <a:noFill/>
-        </p:spPr>
-        <p:txBody>
-          <a:bodyPr wrap="square" lIns="0" rIns="0" tIns="0" bIns="0" anchor="t">
-            <a:spAutoFit/>
-          </a:bodyPr>
+          <a:bodyPr rtlCol="0" anchor="t" wrap="square" lIns="110000" rIns="110000" tIns="95000" bIns="95000"/>
           <a:lstStyle/>
           <a:p>
             <a:pPr algn="l">
@@ -46466,34 +44718,14 @@
               <a:t>위험한 자동화</a:t>
             </a:r>
           </a:p>
-        </p:txBody>
-      </p:sp>
-      <p:sp>
-        <p:nvSpPr>
-          <p:cNvPr id="12" name="TextBox 11"/>
-          <p:cNvSpPr txBox="1"/>
-          <p:nvPr/>
-        </p:nvSpPr>
-        <p:spPr>
-          <a:xfrm>
-            <a:off x="668640" y="4449060"/>
-            <a:ext cx="5192907" cy="1328820"/>
-          </a:xfrm>
-          <a:prstGeom prst="rect">
-            <a:avLst/>
-          </a:prstGeom>
-          <a:noFill/>
-        </p:spPr>
-        <p:txBody>
-          <a:bodyPr wrap="square" lIns="0" rIns="0" tIns="0" bIns="0" anchor="t">
-            <a:spAutoFit/>
-          </a:bodyPr>
-          <a:lstStyle/>
-          <a:p>
-            <a:pPr algn="l">
-              <a:lnSpc>
-                <a:spcPct val="125000"/>
-              </a:lnSpc>
+          <a:p>
+            <a:pPr algn="l">
+              <a:lnSpc>
+                <a:spcPct val="118000"/>
+              </a:lnSpc>
+              <a:spcBef>
+                <a:spcPts val="400"/>
+              </a:spcBef>
             </a:pPr>
             <a:r>
               <a:rPr sz="1500" b="0" i="0">
@@ -46509,7 +44741,7 @@
       </p:sp>
       <p:sp>
         <p:nvSpPr>
-          <p:cNvPr id="13" name="Rounded Rectangle 12"/>
+          <p:cNvPr id="7" name="Rounded Rectangle 6"/>
           <p:cNvSpPr/>
           <p:nvPr/>
         </p:nvSpPr>
@@ -46548,23 +44780,55 @@
           </a:fontRef>
         </p:style>
         <p:txBody>
-          <a:bodyPr rtlCol="0" anchor="ctr"/>
-          <a:lstStyle/>
-          <a:p>
-            <a:pPr algn="ctr"/>
-          </a:p>
-        </p:txBody>
-      </p:sp>
-      <p:sp>
-        <p:nvSpPr>
-          <p:cNvPr id="14" name="TextBox 13"/>
+          <a:bodyPr rtlCol="0" anchor="t" wrap="square" lIns="110000" rIns="110000" tIns="95000" bIns="95000"/>
+          <a:lstStyle/>
+          <a:p>
+            <a:pPr algn="l">
+              <a:lnSpc>
+                <a:spcPct val="115000"/>
+              </a:lnSpc>
+            </a:pPr>
+            <a:r>
+              <a:rPr sz="1700" b="1" i="0">
+                <a:solidFill>
+                  <a:srgbClr val="111111"/>
+                </a:solidFill>
+                <a:latin typeface="Apple SD Gothic Neo"/>
+              </a:rPr>
+              <a:t>구조적 견고성</a:t>
+            </a:r>
+          </a:p>
+          <a:p>
+            <a:pPr algn="l">
+              <a:lnSpc>
+                <a:spcPct val="118000"/>
+              </a:lnSpc>
+              <a:spcBef>
+                <a:spcPts val="400"/>
+              </a:spcBef>
+            </a:pPr>
+            <a:r>
+              <a:rPr sz="1500" b="0" i="0">
+                <a:solidFill>
+                  <a:srgbClr val="333333"/>
+                </a:solidFill>
+                <a:latin typeface="Apple SD Gothic Neo"/>
+              </a:rPr>
+              <a:t>데이터/모델 변경에 버틸 수 있는가</a:t>
+            </a:r>
+          </a:p>
+        </p:txBody>
+      </p:sp>
+      <p:sp>
+        <p:nvSpPr>
+          <p:cNvPr id="8" name="TextBox 7"/>
           <p:cNvSpPr txBox="1"/>
           <p:nvPr/>
         </p:nvSpPr>
         <p:spPr>
           <a:xfrm>
-            <a:off x="6330147" y="4029060"/>
-            <a:ext cx="5192907" cy="450000"/>
+            <a:off x="548640" y="6492240"/>
+            <a:ext cx="5486400" cy="274320"/>
           </a:xfrm>
           <a:prstGeom prst="rect">
             <a:avLst/>
@@ -46583,90 +44847,12 @@
               </a:lnSpc>
             </a:pPr>
             <a:r>
-              <a:rPr sz="1700" b="1" i="0">
-                <a:solidFill>
-                  <a:srgbClr val="111111"/>
-                </a:solidFill>
-                <a:latin typeface="Apple SD Gothic Neo"/>
-              </a:rPr>
-              <a:t>구조적 견고성</a:t>
-            </a:r>
-          </a:p>
-        </p:txBody>
-      </p:sp>
-      <p:sp>
-        <p:nvSpPr>
-          <p:cNvPr id="15" name="TextBox 14"/>
-          <p:cNvSpPr txBox="1"/>
-          <p:nvPr/>
-        </p:nvSpPr>
-        <p:spPr>
-          <a:xfrm>
-            <a:off x="6330147" y="4449060"/>
-            <a:ext cx="5192907" cy="1328820"/>
-          </a:xfrm>
-          <a:prstGeom prst="rect">
-            <a:avLst/>
-          </a:prstGeom>
-          <a:noFill/>
-        </p:spPr>
-        <p:txBody>
-          <a:bodyPr wrap="square" lIns="0" rIns="0" tIns="0" bIns="0" anchor="t">
-            <a:spAutoFit/>
-          </a:bodyPr>
-          <a:lstStyle/>
-          <a:p>
-            <a:pPr algn="l">
-              <a:lnSpc>
-                <a:spcPct val="125000"/>
-              </a:lnSpc>
-            </a:pPr>
-            <a:r>
-              <a:rPr sz="1500" b="0" i="0">
+              <a:rPr sz="1200" b="0" i="0">
                 <a:solidFill>
                   <a:srgbClr val="333333"/>
                 </a:solidFill>
                 <a:latin typeface="Apple SD Gothic Neo"/>
               </a:rPr>
-              <a:t>데이터/모델 변경에 버틸 수 있는가</a:t>
-            </a:r>
-          </a:p>
-        </p:txBody>
-      </p:sp>
-      <p:sp>
-        <p:nvSpPr>
-          <p:cNvPr id="16" name="TextBox 15"/>
-          <p:cNvSpPr txBox="1"/>
-          <p:nvPr/>
-        </p:nvSpPr>
-        <p:spPr>
-          <a:xfrm>
-            <a:off x="548640" y="6492240"/>
-            <a:ext cx="5486400" cy="274320"/>
-          </a:xfrm>
-          <a:prstGeom prst="rect">
-            <a:avLst/>
-          </a:prstGeom>
-          <a:noFill/>
-        </p:spPr>
-        <p:txBody>
-          <a:bodyPr wrap="square" lIns="0" rIns="0" tIns="0" bIns="0" anchor="t">
-            <a:spAutoFit/>
-          </a:bodyPr>
-          <a:lstStyle/>
-          <a:p>
-            <a:pPr algn="l">
-              <a:lnSpc>
-                <a:spcPct val="115000"/>
-              </a:lnSpc>
-            </a:pPr>
-            <a:r>
-              <a:rPr sz="1200" b="0" i="0">
-                <a:solidFill>
-                  <a:srgbClr val="333333"/>
-                </a:solidFill>
-                <a:latin typeface="Apple SD Gothic Neo"/>
-              </a:rPr>
               <a:t>개발자에서 AI Native로 · 서울AI재단 5시간 워크숍</a:t>
             </a:r>
           </a:p>
@@ -46674,7 +44860,7 @@
       </p:sp>
       <p:sp>
         <p:nvSpPr>
-          <p:cNvPr id="17" name="TextBox 16"/>
+          <p:cNvPr id="9" name="TextBox 8"/>
           <p:cNvSpPr txBox="1"/>
           <p:nvPr/>
         </p:nvSpPr>
@@ -49640,33 +47826,7 @@
           </a:fontRef>
         </p:style>
         <p:txBody>
-          <a:bodyPr rtlCol="0" anchor="ctr"/>
-          <a:lstStyle/>
-          <a:p>
-            <a:pPr algn="ctr"/>
-          </a:p>
-        </p:txBody>
-      </p:sp>
-      <p:sp>
-        <p:nvSpPr>
-          <p:cNvPr id="5" name="TextBox 4"/>
-          <p:cNvSpPr txBox="1"/>
-          <p:nvPr/>
-        </p:nvSpPr>
-        <p:spPr>
-          <a:xfrm>
-            <a:off x="668640" y="1811640"/>
-            <a:ext cx="5192907" cy="450000"/>
-          </a:xfrm>
-          <a:prstGeom prst="rect">
-            <a:avLst/>
-          </a:prstGeom>
-          <a:noFill/>
-        </p:spPr>
-        <p:txBody>
-          <a:bodyPr wrap="square" lIns="0" rIns="0" tIns="0" bIns="0" anchor="t">
-            <a:spAutoFit/>
-          </a:bodyPr>
+          <a:bodyPr rtlCol="0" anchor="t" wrap="square" lIns="110000" rIns="110000" tIns="95000" bIns="95000"/>
           <a:lstStyle/>
           <a:p>
             <a:pPr algn="l">
@@ -49684,34 +47844,14 @@
               <a:t>실제 LLM API</a:t>
             </a:r>
           </a:p>
-        </p:txBody>
-      </p:sp>
-      <p:sp>
-        <p:nvSpPr>
-          <p:cNvPr id="6" name="TextBox 5"/>
-          <p:cNvSpPr txBox="1"/>
-          <p:nvPr/>
-        </p:nvSpPr>
-        <p:spPr>
-          <a:xfrm>
-            <a:off x="668640" y="2231640"/>
-            <a:ext cx="5192907" cy="1328820"/>
-          </a:xfrm>
-          <a:prstGeom prst="rect">
-            <a:avLst/>
-          </a:prstGeom>
-          <a:noFill/>
-        </p:spPr>
-        <p:txBody>
-          <a:bodyPr wrap="square" lIns="0" rIns="0" tIns="0" bIns="0" anchor="t">
-            <a:spAutoFit/>
-          </a:bodyPr>
-          <a:lstStyle/>
-          <a:p>
-            <a:pPr algn="l">
-              <a:lnSpc>
-                <a:spcPct val="125000"/>
-              </a:lnSpc>
+          <a:p>
+            <a:pPr algn="l">
+              <a:lnSpc>
+                <a:spcPct val="118000"/>
+              </a:lnSpc>
+              <a:spcBef>
+                <a:spcPts val="400"/>
+              </a:spcBef>
             </a:pPr>
             <a:r>
               <a:rPr sz="1500" b="0" i="0">
@@ -49727,7 +47867,7 @@
       </p:sp>
       <p:sp>
         <p:nvSpPr>
-          <p:cNvPr id="7" name="Rounded Rectangle 6"/>
+          <p:cNvPr id="5" name="Rounded Rectangle 4"/>
           <p:cNvSpPr/>
           <p:nvPr/>
         </p:nvSpPr>
@@ -49766,33 +47906,7 @@
           </a:fontRef>
         </p:style>
         <p:txBody>
-          <a:bodyPr rtlCol="0" anchor="ctr"/>
-          <a:lstStyle/>
-          <a:p>
-            <a:pPr algn="ctr"/>
-          </a:p>
-        </p:txBody>
-      </p:sp>
-      <p:sp>
-        <p:nvSpPr>
-          <p:cNvPr id="8" name="TextBox 7"/>
-          <p:cNvSpPr txBox="1"/>
-          <p:nvPr/>
-        </p:nvSpPr>
-        <p:spPr>
-          <a:xfrm>
-            <a:off x="6330147" y="1811640"/>
-            <a:ext cx="5192907" cy="450000"/>
-          </a:xfrm>
-          <a:prstGeom prst="rect">
-            <a:avLst/>
-          </a:prstGeom>
-          <a:noFill/>
-        </p:spPr>
-        <p:txBody>
-          <a:bodyPr wrap="square" lIns="0" rIns="0" tIns="0" bIns="0" anchor="t">
-            <a:spAutoFit/>
-          </a:bodyPr>
+          <a:bodyPr rtlCol="0" anchor="t" wrap="square" lIns="110000" rIns="110000" tIns="95000" bIns="95000"/>
           <a:lstStyle/>
           <a:p>
             <a:pPr algn="l">
@@ -49810,34 +47924,14 @@
               <a:t>RAG</a:t>
             </a:r>
           </a:p>
-        </p:txBody>
-      </p:sp>
-      <p:sp>
-        <p:nvSpPr>
-          <p:cNvPr id="9" name="TextBox 8"/>
-          <p:cNvSpPr txBox="1"/>
-          <p:nvPr/>
-        </p:nvSpPr>
-        <p:spPr>
-          <a:xfrm>
-            <a:off x="6330147" y="2231640"/>
-            <a:ext cx="5192907" cy="1328820"/>
-          </a:xfrm>
-          <a:prstGeom prst="rect">
-            <a:avLst/>
-          </a:prstGeom>
-          <a:noFill/>
-        </p:spPr>
-        <p:txBody>
-          <a:bodyPr wrap="square" lIns="0" rIns="0" tIns="0" bIns="0" anchor="t">
-            <a:spAutoFit/>
-          </a:bodyPr>
-          <a:lstStyle/>
-          <a:p>
-            <a:pPr algn="l">
-              <a:lnSpc>
-                <a:spcPct val="125000"/>
-              </a:lnSpc>
+          <a:p>
+            <a:pPr algn="l">
+              <a:lnSpc>
+                <a:spcPct val="118000"/>
+              </a:lnSpc>
+              <a:spcBef>
+                <a:spcPts val="400"/>
+              </a:spcBef>
             </a:pPr>
             <a:r>
               <a:rPr sz="1500" b="0" i="0">
@@ -49853,7 +47947,7 @@
       </p:sp>
       <p:sp>
         <p:nvSpPr>
-          <p:cNvPr id="10" name="Rounded Rectangle 9"/>
+          <p:cNvPr id="6" name="Rounded Rectangle 5"/>
           <p:cNvSpPr/>
           <p:nvPr/>
         </p:nvSpPr>
@@ -49892,33 +47986,7 @@
           </a:fontRef>
         </p:style>
         <p:txBody>
-          <a:bodyPr rtlCol="0" anchor="ctr"/>
-          <a:lstStyle/>
-          <a:p>
-            <a:pPr algn="ctr"/>
-          </a:p>
-        </p:txBody>
-      </p:sp>
-      <p:sp>
-        <p:nvSpPr>
-          <p:cNvPr id="11" name="TextBox 10"/>
-          <p:cNvSpPr txBox="1"/>
-          <p:nvPr/>
-        </p:nvSpPr>
-        <p:spPr>
-          <a:xfrm>
-            <a:off x="668640" y="4029060"/>
-            <a:ext cx="5192907" cy="450000"/>
-          </a:xfrm>
-          <a:prstGeom prst="rect">
-            <a:avLst/>
-          </a:prstGeom>
-          <a:noFill/>
-        </p:spPr>
-        <p:txBody>
-          <a:bodyPr wrap="square" lIns="0" rIns="0" tIns="0" bIns="0" anchor="t">
-            <a:spAutoFit/>
-          </a:bodyPr>
+          <a:bodyPr rtlCol="0" anchor="t" wrap="square" lIns="110000" rIns="110000" tIns="95000" bIns="95000"/>
           <a:lstStyle/>
           <a:p>
             <a:pPr algn="l">
@@ -49936,34 +48004,14 @@
               <a:t>운영자 승인 플로우</a:t>
             </a:r>
           </a:p>
-        </p:txBody>
-      </p:sp>
-      <p:sp>
-        <p:nvSpPr>
-          <p:cNvPr id="12" name="TextBox 11"/>
-          <p:cNvSpPr txBox="1"/>
-          <p:nvPr/>
-        </p:nvSpPr>
-        <p:spPr>
-          <a:xfrm>
-            <a:off x="668640" y="4449060"/>
-            <a:ext cx="5192907" cy="1328820"/>
-          </a:xfrm>
-          <a:prstGeom prst="rect">
-            <a:avLst/>
-          </a:prstGeom>
-          <a:noFill/>
-        </p:spPr>
-        <p:txBody>
-          <a:bodyPr wrap="square" lIns="0" rIns="0" tIns="0" bIns="0" anchor="t">
-            <a:spAutoFit/>
-          </a:bodyPr>
-          <a:lstStyle/>
-          <a:p>
-            <a:pPr algn="l">
-              <a:lnSpc>
-                <a:spcPct val="125000"/>
-              </a:lnSpc>
+          <a:p>
+            <a:pPr algn="l">
+              <a:lnSpc>
+                <a:spcPct val="118000"/>
+              </a:lnSpc>
+              <a:spcBef>
+                <a:spcPts val="400"/>
+              </a:spcBef>
             </a:pPr>
             <a:r>
               <a:rPr sz="1500" b="0" i="0">
@@ -49979,7 +48027,7 @@
       </p:sp>
       <p:sp>
         <p:nvSpPr>
-          <p:cNvPr id="13" name="Rounded Rectangle 12"/>
+          <p:cNvPr id="7" name="Rounded Rectangle 6"/>
           <p:cNvSpPr/>
           <p:nvPr/>
         </p:nvSpPr>
@@ -50018,23 +48066,55 @@
           </a:fontRef>
         </p:style>
         <p:txBody>
-          <a:bodyPr rtlCol="0" anchor="ctr"/>
-          <a:lstStyle/>
-          <a:p>
-            <a:pPr algn="ctr"/>
-          </a:p>
-        </p:txBody>
-      </p:sp>
-      <p:sp>
-        <p:nvSpPr>
-          <p:cNvPr id="14" name="TextBox 13"/>
+          <a:bodyPr rtlCol="0" anchor="t" wrap="square" lIns="110000" rIns="110000" tIns="95000" bIns="95000"/>
+          <a:lstStyle/>
+          <a:p>
+            <a:pPr algn="l">
+              <a:lnSpc>
+                <a:spcPct val="115000"/>
+              </a:lnSpc>
+            </a:pPr>
+            <a:r>
+              <a:rPr sz="1700" b="1" i="0">
+                <a:solidFill>
+                  <a:srgbClr val="111111"/>
+                </a:solidFill>
+                <a:latin typeface="Apple SD Gothic Neo"/>
+              </a:rPr>
+              <a:t>개인정보와 로그</a:t>
+            </a:r>
+          </a:p>
+          <a:p>
+            <a:pPr algn="l">
+              <a:lnSpc>
+                <a:spcPct val="118000"/>
+              </a:lnSpc>
+              <a:spcBef>
+                <a:spcPts val="400"/>
+              </a:spcBef>
+            </a:pPr>
+            <a:r>
+              <a:rPr sz="1500" b="0" i="0">
+                <a:solidFill>
+                  <a:srgbClr val="333333"/>
+                </a:solidFill>
+                <a:latin typeface="Apple SD Gothic Neo"/>
+              </a:rPr>
+              <a:t>어떻게 관리할까</a:t>
+            </a:r>
+          </a:p>
+        </p:txBody>
+      </p:sp>
+      <p:sp>
+        <p:nvSpPr>
+          <p:cNvPr id="8" name="TextBox 7"/>
           <p:cNvSpPr txBox="1"/>
           <p:nvPr/>
         </p:nvSpPr>
         <p:spPr>
           <a:xfrm>
-            <a:off x="6330147" y="4029060"/>
-            <a:ext cx="5192907" cy="450000"/>
+            <a:off x="548640" y="6492240"/>
+            <a:ext cx="5486400" cy="274320"/>
           </a:xfrm>
           <a:prstGeom prst="rect">
             <a:avLst/>
@@ -50053,90 +48133,12 @@
               </a:lnSpc>
             </a:pPr>
             <a:r>
-              <a:rPr sz="1700" b="1" i="0">
-                <a:solidFill>
-                  <a:srgbClr val="111111"/>
-                </a:solidFill>
-                <a:latin typeface="Apple SD Gothic Neo"/>
-              </a:rPr>
-              <a:t>개인정보와 로그</a:t>
-            </a:r>
-          </a:p>
-        </p:txBody>
-      </p:sp>
-      <p:sp>
-        <p:nvSpPr>
-          <p:cNvPr id="15" name="TextBox 14"/>
-          <p:cNvSpPr txBox="1"/>
-          <p:nvPr/>
-        </p:nvSpPr>
-        <p:spPr>
-          <a:xfrm>
-            <a:off x="6330147" y="4449060"/>
-            <a:ext cx="5192907" cy="1328820"/>
-          </a:xfrm>
-          <a:prstGeom prst="rect">
-            <a:avLst/>
-          </a:prstGeom>
-          <a:noFill/>
-        </p:spPr>
-        <p:txBody>
-          <a:bodyPr wrap="square" lIns="0" rIns="0" tIns="0" bIns="0" anchor="t">
-            <a:spAutoFit/>
-          </a:bodyPr>
-          <a:lstStyle/>
-          <a:p>
-            <a:pPr algn="l">
-              <a:lnSpc>
-                <a:spcPct val="125000"/>
-              </a:lnSpc>
-            </a:pPr>
-            <a:r>
-              <a:rPr sz="1500" b="0" i="0">
+              <a:rPr sz="1200" b="0" i="0">
                 <a:solidFill>
                   <a:srgbClr val="333333"/>
                 </a:solidFill>
                 <a:latin typeface="Apple SD Gothic Neo"/>
               </a:rPr>
-              <a:t>어떻게 관리할까</a:t>
-            </a:r>
-          </a:p>
-        </p:txBody>
-      </p:sp>
-      <p:sp>
-        <p:nvSpPr>
-          <p:cNvPr id="16" name="TextBox 15"/>
-          <p:cNvSpPr txBox="1"/>
-          <p:nvPr/>
-        </p:nvSpPr>
-        <p:spPr>
-          <a:xfrm>
-            <a:off x="548640" y="6492240"/>
-            <a:ext cx="5486400" cy="274320"/>
-          </a:xfrm>
-          <a:prstGeom prst="rect">
-            <a:avLst/>
-          </a:prstGeom>
-          <a:noFill/>
-        </p:spPr>
-        <p:txBody>
-          <a:bodyPr wrap="square" lIns="0" rIns="0" tIns="0" bIns="0" anchor="t">
-            <a:spAutoFit/>
-          </a:bodyPr>
-          <a:lstStyle/>
-          <a:p>
-            <a:pPr algn="l">
-              <a:lnSpc>
-                <a:spcPct val="115000"/>
-              </a:lnSpc>
-            </a:pPr>
-            <a:r>
-              <a:rPr sz="1200" b="0" i="0">
-                <a:solidFill>
-                  <a:srgbClr val="333333"/>
-                </a:solidFill>
-                <a:latin typeface="Apple SD Gothic Neo"/>
-              </a:rPr>
               <a:t>개발자에서 AI Native로 · 서울AI재단 5시간 워크숍</a:t>
             </a:r>
           </a:p>
@@ -50144,7 +48146,7 @@
       </p:sp>
       <p:sp>
         <p:nvSpPr>
-          <p:cNvPr id="17" name="TextBox 16"/>
+          <p:cNvPr id="9" name="TextBox 8"/>
           <p:cNvSpPr txBox="1"/>
           <p:nvPr/>
         </p:nvSpPr>
